--- a/architecture.pptx
+++ b/architecture.pptx
@@ -6,6 +6,7 @@
   </p:sldMasterIdLst>
   <p:sldIdLst>
     <p:sldId id="256" r:id="rId2"/>
+    <p:sldId id="257" r:id="rId3"/>
   </p:sldIdLst>
   <p:sldSz cx="12192000" cy="6858000"/>
   <p:notesSz cx="6858000" cy="9144000"/>
@@ -104,6 +105,11 @@
       </a:defRPr>
     </a:lvl9pPr>
   </p:defaultTextStyle>
+  <p:extLst>
+    <p:ext uri="{EFAFB233-063F-42B5-8137-9DF3F51BA10A}">
+      <p15:sldGuideLst xmlns:p15="http://schemas.microsoft.com/office/powerpoint/2012/main"/>
+    </p:ext>
+  </p:extLst>
 </p:presentation>
 </file>
 
@@ -254,7 +260,7 @@
           <a:p>
             <a:fld id="{8FB45112-E348-6E43-BD51-2AA3244EA859}" type="datetimeFigureOut">
               <a:rPr lang="en-US" smtClean="0"/>
-              <a:t>1/9/23</a:t>
+              <a:t>1/11/23</a:t>
             </a:fld>
             <a:endParaRPr lang="en-US"/>
           </a:p>
@@ -452,7 +458,7 @@
           <a:p>
             <a:fld id="{8FB45112-E348-6E43-BD51-2AA3244EA859}" type="datetimeFigureOut">
               <a:rPr lang="en-US" smtClean="0"/>
-              <a:t>1/9/23</a:t>
+              <a:t>1/11/23</a:t>
             </a:fld>
             <a:endParaRPr lang="en-US"/>
           </a:p>
@@ -660,7 +666,7 @@
           <a:p>
             <a:fld id="{8FB45112-E348-6E43-BD51-2AA3244EA859}" type="datetimeFigureOut">
               <a:rPr lang="en-US" smtClean="0"/>
-              <a:t>1/9/23</a:t>
+              <a:t>1/11/23</a:t>
             </a:fld>
             <a:endParaRPr lang="en-US"/>
           </a:p>
@@ -858,7 +864,7 @@
           <a:p>
             <a:fld id="{8FB45112-E348-6E43-BD51-2AA3244EA859}" type="datetimeFigureOut">
               <a:rPr lang="en-US" smtClean="0"/>
-              <a:t>1/9/23</a:t>
+              <a:t>1/11/23</a:t>
             </a:fld>
             <a:endParaRPr lang="en-US"/>
           </a:p>
@@ -1133,7 +1139,7 @@
           <a:p>
             <a:fld id="{8FB45112-E348-6E43-BD51-2AA3244EA859}" type="datetimeFigureOut">
               <a:rPr lang="en-US" smtClean="0"/>
-              <a:t>1/9/23</a:t>
+              <a:t>1/11/23</a:t>
             </a:fld>
             <a:endParaRPr lang="en-US"/>
           </a:p>
@@ -1398,7 +1404,7 @@
           <a:p>
             <a:fld id="{8FB45112-E348-6E43-BD51-2AA3244EA859}" type="datetimeFigureOut">
               <a:rPr lang="en-US" smtClean="0"/>
-              <a:t>1/9/23</a:t>
+              <a:t>1/11/23</a:t>
             </a:fld>
             <a:endParaRPr lang="en-US"/>
           </a:p>
@@ -1810,7 +1816,7 @@
           <a:p>
             <a:fld id="{8FB45112-E348-6E43-BD51-2AA3244EA859}" type="datetimeFigureOut">
               <a:rPr lang="en-US" smtClean="0"/>
-              <a:t>1/9/23</a:t>
+              <a:t>1/11/23</a:t>
             </a:fld>
             <a:endParaRPr lang="en-US"/>
           </a:p>
@@ -1951,7 +1957,7 @@
           <a:p>
             <a:fld id="{8FB45112-E348-6E43-BD51-2AA3244EA859}" type="datetimeFigureOut">
               <a:rPr lang="en-US" smtClean="0"/>
-              <a:t>1/9/23</a:t>
+              <a:t>1/11/23</a:t>
             </a:fld>
             <a:endParaRPr lang="en-US"/>
           </a:p>
@@ -2064,7 +2070,7 @@
           <a:p>
             <a:fld id="{8FB45112-E348-6E43-BD51-2AA3244EA859}" type="datetimeFigureOut">
               <a:rPr lang="en-US" smtClean="0"/>
-              <a:t>1/9/23</a:t>
+              <a:t>1/11/23</a:t>
             </a:fld>
             <a:endParaRPr lang="en-US"/>
           </a:p>
@@ -2375,7 +2381,7 @@
           <a:p>
             <a:fld id="{8FB45112-E348-6E43-BD51-2AA3244EA859}" type="datetimeFigureOut">
               <a:rPr lang="en-US" smtClean="0"/>
-              <a:t>1/9/23</a:t>
+              <a:t>1/11/23</a:t>
             </a:fld>
             <a:endParaRPr lang="en-US"/>
           </a:p>
@@ -2663,7 +2669,7 @@
           <a:p>
             <a:fld id="{8FB45112-E348-6E43-BD51-2AA3244EA859}" type="datetimeFigureOut">
               <a:rPr lang="en-US" smtClean="0"/>
-              <a:t>1/9/23</a:t>
+              <a:t>1/11/23</a:t>
             </a:fld>
             <a:endParaRPr lang="en-US"/>
           </a:p>
@@ -2904,7 +2910,7 @@
           <a:p>
             <a:fld id="{8FB45112-E348-6E43-BD51-2AA3244EA859}" type="datetimeFigureOut">
               <a:rPr lang="en-US" smtClean="0"/>
-              <a:t>1/9/23</a:t>
+              <a:t>1/11/23</a:t>
             </a:fld>
             <a:endParaRPr lang="en-US"/>
           </a:p>
@@ -7635,6 +7641,4193 @@
 </p:sld>
 </file>
 
+<file path=ppt/slides/slide2.xml><?xml version="1.0" encoding="utf-8"?>
+<p:sld xmlns:a="http://schemas.openxmlformats.org/drawingml/2006/main" xmlns:r="http://schemas.openxmlformats.org/officeDocument/2006/relationships" xmlns:p="http://schemas.openxmlformats.org/presentationml/2006/main">
+  <p:cSld>
+    <p:spTree>
+      <p:nvGrpSpPr>
+        <p:cNvPr id="1" name=""/>
+        <p:cNvGrpSpPr/>
+        <p:nvPr/>
+      </p:nvGrpSpPr>
+      <p:grpSpPr>
+        <a:xfrm>
+          <a:off x="0" y="0"/>
+          <a:ext cx="0" cy="0"/>
+          <a:chOff x="0" y="0"/>
+          <a:chExt cx="0" cy="0"/>
+        </a:xfrm>
+      </p:grpSpPr>
+      <p:sp>
+        <p:nvSpPr>
+          <p:cNvPr id="55" name="Rectangle 54">
+            <a:extLst>
+              <a:ext uri="{FF2B5EF4-FFF2-40B4-BE49-F238E27FC236}">
+                <a16:creationId xmlns:a16="http://schemas.microsoft.com/office/drawing/2014/main" id="{B438D507-6B50-A941-9DC2-E3267F325944}"/>
+              </a:ext>
+            </a:extLst>
+          </p:cNvPr>
+          <p:cNvSpPr/>
+          <p:nvPr/>
+        </p:nvSpPr>
+        <p:spPr>
+          <a:xfrm>
+            <a:off x="1917497" y="4737172"/>
+            <a:ext cx="2596412" cy="1524843"/>
+          </a:xfrm>
+          <a:prstGeom prst="rect">
+            <a:avLst/>
+          </a:prstGeom>
+          <a:solidFill>
+            <a:srgbClr val="1D8900">
+              <a:alpha val="9804"/>
+            </a:srgbClr>
+          </a:solidFill>
+          <a:ln w="12700">
+            <a:noFill/>
+            <a:prstDash val="dash"/>
+          </a:ln>
+        </p:spPr>
+        <p:style>
+          <a:lnRef idx="2">
+            <a:schemeClr val="accent1">
+              <a:shade val="50000"/>
+            </a:schemeClr>
+          </a:lnRef>
+          <a:fillRef idx="1">
+            <a:schemeClr val="accent1"/>
+          </a:fillRef>
+          <a:effectRef idx="0">
+            <a:schemeClr val="accent1"/>
+          </a:effectRef>
+          <a:fontRef idx="minor">
+            <a:schemeClr val="lt1"/>
+          </a:fontRef>
+        </p:style>
+        <p:txBody>
+          <a:bodyPr lIns="502920"/>
+          <a:lstStyle/>
+          <a:p>
+            <a:pPr eaLnBrk="1" fontAlgn="auto" hangingPunct="1">
+              <a:spcBef>
+                <a:spcPts val="0"/>
+              </a:spcBef>
+              <a:spcAft>
+                <a:spcPts val="0"/>
+              </a:spcAft>
+              <a:defRPr/>
+            </a:pPr>
+            <a:r>
+              <a:rPr lang="en-US" sz="1200" dirty="0">
+                <a:solidFill>
+                  <a:srgbClr val="1E8900"/>
+                </a:solidFill>
+                <a:latin typeface="Arial" panose="020B0604020202020204" pitchFamily="34" charset="0"/>
+                <a:cs typeface="Arial" panose="020B0604020202020204" pitchFamily="34" charset="0"/>
+              </a:rPr>
+              <a:t>Public subnet</a:t>
+            </a:r>
+          </a:p>
+        </p:txBody>
+      </p:sp>
+      <p:pic>
+        <p:nvPicPr>
+          <p:cNvPr id="4" name="Graphic 13">
+            <a:extLst>
+              <a:ext uri="{FF2B5EF4-FFF2-40B4-BE49-F238E27FC236}">
+                <a16:creationId xmlns:a16="http://schemas.microsoft.com/office/drawing/2014/main" id="{BBB26E4E-0F9C-69ED-78DB-0D7624C4BFDF}"/>
+              </a:ext>
+            </a:extLst>
+          </p:cNvPr>
+          <p:cNvPicPr>
+            <a:picLocks noChangeAspect="1" noChangeArrowheads="1"/>
+          </p:cNvPicPr>
+          <p:nvPr/>
+        </p:nvPicPr>
+        <p:blipFill>
+          <a:blip r:embed="rId2">
+            <a:extLst>
+              <a:ext uri="{96DAC541-7B7A-43D3-8B79-37D633B846F1}">
+                <asvg:svgBlip xmlns:asvg="http://schemas.microsoft.com/office/drawing/2016/SVG/main" r:embed="rId3"/>
+              </a:ext>
+            </a:extLst>
+          </a:blip>
+          <a:srcRect/>
+          <a:stretch/>
+        </p:blipFill>
+        <p:spPr bwMode="auto">
+          <a:xfrm>
+            <a:off x="3522301" y="3208140"/>
+            <a:ext cx="395048" cy="395048"/>
+          </a:xfrm>
+          <a:prstGeom prst="rect">
+            <a:avLst/>
+          </a:prstGeom>
+          <a:noFill/>
+          <a:ln>
+            <a:noFill/>
+          </a:ln>
+          <a:extLst>
+            <a:ext uri="{909E8E84-426E-40DD-AFC4-6F175D3DCCD1}">
+              <a14:hiddenFill xmlns:a14="http://schemas.microsoft.com/office/drawing/2010/main">
+                <a:solidFill>
+                  <a:srgbClr val="FFFFFF"/>
+                </a:solidFill>
+              </a14:hiddenFill>
+            </a:ext>
+            <a:ext uri="{91240B29-F687-4F45-9708-019B960494DF}">
+              <a14:hiddenLine xmlns:a14="http://schemas.microsoft.com/office/drawing/2010/main" w="9525">
+                <a:solidFill>
+                  <a:srgbClr val="000000"/>
+                </a:solidFill>
+                <a:miter lim="800000"/>
+                <a:headEnd/>
+                <a:tailEnd/>
+              </a14:hiddenLine>
+            </a:ext>
+          </a:extLst>
+        </p:spPr>
+      </p:pic>
+      <p:sp>
+        <p:nvSpPr>
+          <p:cNvPr id="5" name="TextBox 24">
+            <a:extLst>
+              <a:ext uri="{FF2B5EF4-FFF2-40B4-BE49-F238E27FC236}">
+                <a16:creationId xmlns:a16="http://schemas.microsoft.com/office/drawing/2014/main" id="{D717E2B2-3302-8A3C-CE13-BE69C9F5F38A}"/>
+              </a:ext>
+            </a:extLst>
+          </p:cNvPr>
+          <p:cNvSpPr txBox="1">
+            <a:spLocks noChangeArrowheads="1"/>
+          </p:cNvSpPr>
+          <p:nvPr/>
+        </p:nvSpPr>
+        <p:spPr bwMode="auto">
+          <a:xfrm>
+            <a:off x="2622862" y="3642659"/>
+            <a:ext cx="2201863" cy="261610"/>
+          </a:xfrm>
+          <a:prstGeom prst="rect">
+            <a:avLst/>
+          </a:prstGeom>
+          <a:noFill/>
+          <a:ln>
+            <a:noFill/>
+          </a:ln>
+          <a:extLst>
+            <a:ext uri="{909E8E84-426E-40DD-AFC4-6F175D3DCCD1}">
+              <a14:hiddenFill xmlns:a14="http://schemas.microsoft.com/office/drawing/2010/main">
+                <a:solidFill>
+                  <a:srgbClr val="FFFFFF"/>
+                </a:solidFill>
+              </a14:hiddenFill>
+            </a:ext>
+            <a:ext uri="{91240B29-F687-4F45-9708-019B960494DF}">
+              <a14:hiddenLine xmlns:a14="http://schemas.microsoft.com/office/drawing/2010/main" w="9525">
+                <a:solidFill>
+                  <a:srgbClr val="000000"/>
+                </a:solidFill>
+                <a:miter lim="800000"/>
+                <a:headEnd/>
+                <a:tailEnd/>
+              </a14:hiddenLine>
+            </a:ext>
+          </a:extLst>
+        </p:spPr>
+        <p:txBody>
+          <a:bodyPr>
+            <a:spAutoFit/>
+          </a:bodyPr>
+          <a:lstStyle>
+            <a:lvl1pPr>
+              <a:defRPr>
+                <a:solidFill>
+                  <a:schemeClr val="tx1"/>
+                </a:solidFill>
+                <a:latin typeface="Calibri" panose="020F0502020204030204" pitchFamily="34" charset="0"/>
+              </a:defRPr>
+            </a:lvl1pPr>
+            <a:lvl2pPr marL="742950" indent="-285750">
+              <a:defRPr>
+                <a:solidFill>
+                  <a:schemeClr val="tx1"/>
+                </a:solidFill>
+                <a:latin typeface="Calibri" panose="020F0502020204030204" pitchFamily="34" charset="0"/>
+              </a:defRPr>
+            </a:lvl2pPr>
+            <a:lvl3pPr marL="1143000" indent="-228600">
+              <a:defRPr>
+                <a:solidFill>
+                  <a:schemeClr val="tx1"/>
+                </a:solidFill>
+                <a:latin typeface="Calibri" panose="020F0502020204030204" pitchFamily="34" charset="0"/>
+              </a:defRPr>
+            </a:lvl3pPr>
+            <a:lvl4pPr marL="1600200" indent="-228600">
+              <a:defRPr>
+                <a:solidFill>
+                  <a:schemeClr val="tx1"/>
+                </a:solidFill>
+                <a:latin typeface="Calibri" panose="020F0502020204030204" pitchFamily="34" charset="0"/>
+              </a:defRPr>
+            </a:lvl4pPr>
+            <a:lvl5pPr marL="2057400" indent="-228600">
+              <a:defRPr>
+                <a:solidFill>
+                  <a:schemeClr val="tx1"/>
+                </a:solidFill>
+                <a:latin typeface="Calibri" panose="020F0502020204030204" pitchFamily="34" charset="0"/>
+              </a:defRPr>
+            </a:lvl5pPr>
+            <a:lvl6pPr marL="2514600" indent="-228600" eaLnBrk="0" fontAlgn="base" hangingPunct="0">
+              <a:spcBef>
+                <a:spcPct val="0"/>
+              </a:spcBef>
+              <a:spcAft>
+                <a:spcPct val="0"/>
+              </a:spcAft>
+              <a:defRPr>
+                <a:solidFill>
+                  <a:schemeClr val="tx1"/>
+                </a:solidFill>
+                <a:latin typeface="Calibri" panose="020F0502020204030204" pitchFamily="34" charset="0"/>
+              </a:defRPr>
+            </a:lvl6pPr>
+            <a:lvl7pPr marL="2971800" indent="-228600" eaLnBrk="0" fontAlgn="base" hangingPunct="0">
+              <a:spcBef>
+                <a:spcPct val="0"/>
+              </a:spcBef>
+              <a:spcAft>
+                <a:spcPct val="0"/>
+              </a:spcAft>
+              <a:defRPr>
+                <a:solidFill>
+                  <a:schemeClr val="tx1"/>
+                </a:solidFill>
+                <a:latin typeface="Calibri" panose="020F0502020204030204" pitchFamily="34" charset="0"/>
+              </a:defRPr>
+            </a:lvl7pPr>
+            <a:lvl8pPr marL="3429000" indent="-228600" eaLnBrk="0" fontAlgn="base" hangingPunct="0">
+              <a:spcBef>
+                <a:spcPct val="0"/>
+              </a:spcBef>
+              <a:spcAft>
+                <a:spcPct val="0"/>
+              </a:spcAft>
+              <a:defRPr>
+                <a:solidFill>
+                  <a:schemeClr val="tx1"/>
+                </a:solidFill>
+                <a:latin typeface="Calibri" panose="020F0502020204030204" pitchFamily="34" charset="0"/>
+              </a:defRPr>
+            </a:lvl8pPr>
+            <a:lvl9pPr marL="3886200" indent="-228600" eaLnBrk="0" fontAlgn="base" hangingPunct="0">
+              <a:spcBef>
+                <a:spcPct val="0"/>
+              </a:spcBef>
+              <a:spcAft>
+                <a:spcPct val="0"/>
+              </a:spcAft>
+              <a:defRPr>
+                <a:solidFill>
+                  <a:schemeClr val="tx1"/>
+                </a:solidFill>
+                <a:latin typeface="Calibri" panose="020F0502020204030204" pitchFamily="34" charset="0"/>
+              </a:defRPr>
+            </a:lvl9pPr>
+          </a:lstStyle>
+          <a:p>
+            <a:pPr algn="ctr" eaLnBrk="1" hangingPunct="1"/>
+            <a:r>
+              <a:rPr lang="en-US" altLang="en-US" sz="1100" dirty="0">
+                <a:latin typeface="Arial" panose="020B0604020202020204" pitchFamily="34" charset="0"/>
+                <a:ea typeface="Amazon Ember" panose="020B0603020204020204" pitchFamily="34" charset="0"/>
+                <a:cs typeface="Arial" panose="020B0604020202020204" pitchFamily="34" charset="0"/>
+              </a:rPr>
+              <a:t>AWS Batch</a:t>
+            </a:r>
+          </a:p>
+        </p:txBody>
+      </p:sp>
+      <p:sp>
+        <p:nvSpPr>
+          <p:cNvPr id="8" name="TextBox 18">
+            <a:extLst>
+              <a:ext uri="{FF2B5EF4-FFF2-40B4-BE49-F238E27FC236}">
+                <a16:creationId xmlns:a16="http://schemas.microsoft.com/office/drawing/2014/main" id="{F7A4CDA7-51F0-9979-C60B-B5D617DB4E8A}"/>
+              </a:ext>
+            </a:extLst>
+          </p:cNvPr>
+          <p:cNvSpPr txBox="1">
+            <a:spLocks noChangeArrowheads="1"/>
+          </p:cNvSpPr>
+          <p:nvPr/>
+        </p:nvSpPr>
+        <p:spPr bwMode="auto">
+          <a:xfrm>
+            <a:off x="4184078" y="2384429"/>
+            <a:ext cx="1187450" cy="261610"/>
+          </a:xfrm>
+          <a:prstGeom prst="rect">
+            <a:avLst/>
+          </a:prstGeom>
+          <a:noFill/>
+          <a:ln>
+            <a:noFill/>
+          </a:ln>
+          <a:extLst>
+            <a:ext uri="{909E8E84-426E-40DD-AFC4-6F175D3DCCD1}">
+              <a14:hiddenFill xmlns:a14="http://schemas.microsoft.com/office/drawing/2010/main">
+                <a:solidFill>
+                  <a:srgbClr val="FFFFFF"/>
+                </a:solidFill>
+              </a14:hiddenFill>
+            </a:ext>
+            <a:ext uri="{91240B29-F687-4F45-9708-019B960494DF}">
+              <a14:hiddenLine xmlns:a14="http://schemas.microsoft.com/office/drawing/2010/main" w="9525">
+                <a:solidFill>
+                  <a:srgbClr val="000000"/>
+                </a:solidFill>
+                <a:miter lim="800000"/>
+                <a:headEnd/>
+                <a:tailEnd/>
+              </a14:hiddenLine>
+            </a:ext>
+          </a:extLst>
+        </p:spPr>
+        <p:txBody>
+          <a:bodyPr>
+            <a:spAutoFit/>
+          </a:bodyPr>
+          <a:lstStyle>
+            <a:lvl1pPr>
+              <a:defRPr>
+                <a:solidFill>
+                  <a:schemeClr val="tx1"/>
+                </a:solidFill>
+                <a:latin typeface="Calibri" panose="020F0502020204030204" pitchFamily="34" charset="0"/>
+              </a:defRPr>
+            </a:lvl1pPr>
+            <a:lvl2pPr marL="742950" indent="-285750">
+              <a:defRPr>
+                <a:solidFill>
+                  <a:schemeClr val="tx1"/>
+                </a:solidFill>
+                <a:latin typeface="Calibri" panose="020F0502020204030204" pitchFamily="34" charset="0"/>
+              </a:defRPr>
+            </a:lvl2pPr>
+            <a:lvl3pPr marL="1143000" indent="-228600">
+              <a:defRPr>
+                <a:solidFill>
+                  <a:schemeClr val="tx1"/>
+                </a:solidFill>
+                <a:latin typeface="Calibri" panose="020F0502020204030204" pitchFamily="34" charset="0"/>
+              </a:defRPr>
+            </a:lvl3pPr>
+            <a:lvl4pPr marL="1600200" indent="-228600">
+              <a:defRPr>
+                <a:solidFill>
+                  <a:schemeClr val="tx1"/>
+                </a:solidFill>
+                <a:latin typeface="Calibri" panose="020F0502020204030204" pitchFamily="34" charset="0"/>
+              </a:defRPr>
+            </a:lvl4pPr>
+            <a:lvl5pPr marL="2057400" indent="-228600">
+              <a:defRPr>
+                <a:solidFill>
+                  <a:schemeClr val="tx1"/>
+                </a:solidFill>
+                <a:latin typeface="Calibri" panose="020F0502020204030204" pitchFamily="34" charset="0"/>
+              </a:defRPr>
+            </a:lvl5pPr>
+            <a:lvl6pPr marL="2514600" indent="-228600" eaLnBrk="0" fontAlgn="base" hangingPunct="0">
+              <a:spcBef>
+                <a:spcPct val="0"/>
+              </a:spcBef>
+              <a:spcAft>
+                <a:spcPct val="0"/>
+              </a:spcAft>
+              <a:defRPr>
+                <a:solidFill>
+                  <a:schemeClr val="tx1"/>
+                </a:solidFill>
+                <a:latin typeface="Calibri" panose="020F0502020204030204" pitchFamily="34" charset="0"/>
+              </a:defRPr>
+            </a:lvl6pPr>
+            <a:lvl7pPr marL="2971800" indent="-228600" eaLnBrk="0" fontAlgn="base" hangingPunct="0">
+              <a:spcBef>
+                <a:spcPct val="0"/>
+              </a:spcBef>
+              <a:spcAft>
+                <a:spcPct val="0"/>
+              </a:spcAft>
+              <a:defRPr>
+                <a:solidFill>
+                  <a:schemeClr val="tx1"/>
+                </a:solidFill>
+                <a:latin typeface="Calibri" panose="020F0502020204030204" pitchFamily="34" charset="0"/>
+              </a:defRPr>
+            </a:lvl7pPr>
+            <a:lvl8pPr marL="3429000" indent="-228600" eaLnBrk="0" fontAlgn="base" hangingPunct="0">
+              <a:spcBef>
+                <a:spcPct val="0"/>
+              </a:spcBef>
+              <a:spcAft>
+                <a:spcPct val="0"/>
+              </a:spcAft>
+              <a:defRPr>
+                <a:solidFill>
+                  <a:schemeClr val="tx1"/>
+                </a:solidFill>
+                <a:latin typeface="Calibri" panose="020F0502020204030204" pitchFamily="34" charset="0"/>
+              </a:defRPr>
+            </a:lvl8pPr>
+            <a:lvl9pPr marL="3886200" indent="-228600" eaLnBrk="0" fontAlgn="base" hangingPunct="0">
+              <a:spcBef>
+                <a:spcPct val="0"/>
+              </a:spcBef>
+              <a:spcAft>
+                <a:spcPct val="0"/>
+              </a:spcAft>
+              <a:defRPr>
+                <a:solidFill>
+                  <a:schemeClr val="tx1"/>
+                </a:solidFill>
+                <a:latin typeface="Calibri" panose="020F0502020204030204" pitchFamily="34" charset="0"/>
+              </a:defRPr>
+            </a:lvl9pPr>
+          </a:lstStyle>
+          <a:p>
+            <a:pPr algn="ctr" eaLnBrk="1" hangingPunct="1"/>
+            <a:r>
+              <a:rPr lang="en-US" altLang="en-US" sz="1100" dirty="0">
+                <a:latin typeface="Arial" panose="020B0604020202020204" pitchFamily="34" charset="0"/>
+                <a:ea typeface="Amazon Ember" panose="020B0603020204020204" pitchFamily="34" charset="0"/>
+                <a:cs typeface="Arial" panose="020B0604020202020204" pitchFamily="34" charset="0"/>
+              </a:rPr>
+              <a:t>Event</a:t>
+            </a:r>
+          </a:p>
+        </p:txBody>
+      </p:sp>
+      <p:pic>
+        <p:nvPicPr>
+          <p:cNvPr id="9" name="Graphic 8">
+            <a:extLst>
+              <a:ext uri="{FF2B5EF4-FFF2-40B4-BE49-F238E27FC236}">
+                <a16:creationId xmlns:a16="http://schemas.microsoft.com/office/drawing/2014/main" id="{1EF2C94C-3034-A51E-65A9-60AC5F276759}"/>
+              </a:ext>
+            </a:extLst>
+          </p:cNvPr>
+          <p:cNvPicPr>
+            <a:picLocks noChangeAspect="1" noChangeArrowheads="1"/>
+          </p:cNvPicPr>
+          <p:nvPr/>
+        </p:nvPicPr>
+        <p:blipFill>
+          <a:blip r:embed="rId4">
+            <a:extLst>
+              <a:ext uri="{28A0092B-C50C-407E-A947-70E740481C1C}">
+                <a14:useLocalDpi xmlns:a14="http://schemas.microsoft.com/office/drawing/2010/main" val="0"/>
+              </a:ext>
+            </a:extLst>
+          </a:blip>
+          <a:srcRect/>
+          <a:stretch>
+            <a:fillRect/>
+          </a:stretch>
+        </p:blipFill>
+        <p:spPr bwMode="auto">
+          <a:xfrm>
+            <a:off x="4557140" y="1922176"/>
+            <a:ext cx="457200" cy="457200"/>
+          </a:xfrm>
+          <a:prstGeom prst="rect">
+            <a:avLst/>
+          </a:prstGeom>
+          <a:noFill/>
+          <a:ln>
+            <a:noFill/>
+          </a:ln>
+          <a:extLst>
+            <a:ext uri="{909E8E84-426E-40DD-AFC4-6F175D3DCCD1}">
+              <a14:hiddenFill xmlns:a14="http://schemas.microsoft.com/office/drawing/2010/main">
+                <a:solidFill>
+                  <a:srgbClr val="FFFFFF"/>
+                </a:solidFill>
+              </a14:hiddenFill>
+            </a:ext>
+            <a:ext uri="{91240B29-F687-4F45-9708-019B960494DF}">
+              <a14:hiddenLine xmlns:a14="http://schemas.microsoft.com/office/drawing/2010/main" w="9525">
+                <a:solidFill>
+                  <a:srgbClr val="000000"/>
+                </a:solidFill>
+                <a:miter lim="800000"/>
+                <a:headEnd/>
+                <a:tailEnd/>
+              </a14:hiddenLine>
+            </a:ext>
+          </a:extLst>
+        </p:spPr>
+      </p:pic>
+      <p:pic>
+        <p:nvPicPr>
+          <p:cNvPr id="12" name="Graphic 24">
+            <a:extLst>
+              <a:ext uri="{FF2B5EF4-FFF2-40B4-BE49-F238E27FC236}">
+                <a16:creationId xmlns:a16="http://schemas.microsoft.com/office/drawing/2014/main" id="{BD28E90F-043E-B9C5-9806-D78898A81870}"/>
+              </a:ext>
+            </a:extLst>
+          </p:cNvPr>
+          <p:cNvPicPr>
+            <a:picLocks noChangeAspect="1" noChangeArrowheads="1"/>
+          </p:cNvPicPr>
+          <p:nvPr/>
+        </p:nvPicPr>
+        <p:blipFill>
+          <a:blip r:embed="rId5">
+            <a:extLst>
+              <a:ext uri="{28A0092B-C50C-407E-A947-70E740481C1C}">
+                <a14:useLocalDpi xmlns:a14="http://schemas.microsoft.com/office/drawing/2010/main" val="0"/>
+              </a:ext>
+            </a:extLst>
+          </a:blip>
+          <a:srcRect/>
+          <a:stretch>
+            <a:fillRect/>
+          </a:stretch>
+        </p:blipFill>
+        <p:spPr bwMode="auto">
+          <a:xfrm>
+            <a:off x="2244090" y="1922176"/>
+            <a:ext cx="457200" cy="457200"/>
+          </a:xfrm>
+          <a:prstGeom prst="rect">
+            <a:avLst/>
+          </a:prstGeom>
+          <a:noFill/>
+          <a:ln>
+            <a:noFill/>
+          </a:ln>
+          <a:extLst>
+            <a:ext uri="{909E8E84-426E-40DD-AFC4-6F175D3DCCD1}">
+              <a14:hiddenFill xmlns:a14="http://schemas.microsoft.com/office/drawing/2010/main">
+                <a:solidFill>
+                  <a:srgbClr val="FFFFFF"/>
+                </a:solidFill>
+              </a14:hiddenFill>
+            </a:ext>
+            <a:ext uri="{91240B29-F687-4F45-9708-019B960494DF}">
+              <a14:hiddenLine xmlns:a14="http://schemas.microsoft.com/office/drawing/2010/main" w="9525">
+                <a:solidFill>
+                  <a:srgbClr val="000000"/>
+                </a:solidFill>
+                <a:miter lim="800000"/>
+                <a:headEnd/>
+                <a:tailEnd/>
+              </a14:hiddenLine>
+            </a:ext>
+          </a:extLst>
+        </p:spPr>
+      </p:pic>
+      <p:sp>
+        <p:nvSpPr>
+          <p:cNvPr id="13" name="TextBox 26">
+            <a:extLst>
+              <a:ext uri="{FF2B5EF4-FFF2-40B4-BE49-F238E27FC236}">
+                <a16:creationId xmlns:a16="http://schemas.microsoft.com/office/drawing/2014/main" id="{795AAFED-B17E-48B3-6B1D-1514FFFCF406}"/>
+              </a:ext>
+            </a:extLst>
+          </p:cNvPr>
+          <p:cNvSpPr txBox="1">
+            <a:spLocks noChangeArrowheads="1"/>
+          </p:cNvSpPr>
+          <p:nvPr/>
+        </p:nvSpPr>
+        <p:spPr bwMode="auto">
+          <a:xfrm>
+            <a:off x="2053459" y="2384429"/>
+            <a:ext cx="811012" cy="261610"/>
+          </a:xfrm>
+          <a:prstGeom prst="rect">
+            <a:avLst/>
+          </a:prstGeom>
+          <a:noFill/>
+          <a:ln>
+            <a:noFill/>
+          </a:ln>
+          <a:extLst>
+            <a:ext uri="{909E8E84-426E-40DD-AFC4-6F175D3DCCD1}">
+              <a14:hiddenFill xmlns:a14="http://schemas.microsoft.com/office/drawing/2010/main">
+                <a:solidFill>
+                  <a:srgbClr val="FFFFFF"/>
+                </a:solidFill>
+              </a14:hiddenFill>
+            </a:ext>
+            <a:ext uri="{91240B29-F687-4F45-9708-019B960494DF}">
+              <a14:hiddenLine xmlns:a14="http://schemas.microsoft.com/office/drawing/2010/main" w="9525">
+                <a:solidFill>
+                  <a:srgbClr val="000000"/>
+                </a:solidFill>
+                <a:miter lim="800000"/>
+                <a:headEnd/>
+                <a:tailEnd/>
+              </a14:hiddenLine>
+            </a:ext>
+          </a:extLst>
+        </p:spPr>
+        <p:txBody>
+          <a:bodyPr wrap="square">
+            <a:spAutoFit/>
+          </a:bodyPr>
+          <a:lstStyle>
+            <a:lvl1pPr>
+              <a:defRPr>
+                <a:solidFill>
+                  <a:schemeClr val="tx1"/>
+                </a:solidFill>
+                <a:latin typeface="Calibri" panose="020F0502020204030204" pitchFamily="34" charset="0"/>
+              </a:defRPr>
+            </a:lvl1pPr>
+            <a:lvl2pPr marL="742950" indent="-285750">
+              <a:defRPr>
+                <a:solidFill>
+                  <a:schemeClr val="tx1"/>
+                </a:solidFill>
+                <a:latin typeface="Calibri" panose="020F0502020204030204" pitchFamily="34" charset="0"/>
+              </a:defRPr>
+            </a:lvl2pPr>
+            <a:lvl3pPr marL="1143000" indent="-228600">
+              <a:defRPr>
+                <a:solidFill>
+                  <a:schemeClr val="tx1"/>
+                </a:solidFill>
+                <a:latin typeface="Calibri" panose="020F0502020204030204" pitchFamily="34" charset="0"/>
+              </a:defRPr>
+            </a:lvl3pPr>
+            <a:lvl4pPr marL="1600200" indent="-228600">
+              <a:defRPr>
+                <a:solidFill>
+                  <a:schemeClr val="tx1"/>
+                </a:solidFill>
+                <a:latin typeface="Calibri" panose="020F0502020204030204" pitchFamily="34" charset="0"/>
+              </a:defRPr>
+            </a:lvl4pPr>
+            <a:lvl5pPr marL="2057400" indent="-228600">
+              <a:defRPr>
+                <a:solidFill>
+                  <a:schemeClr val="tx1"/>
+                </a:solidFill>
+                <a:latin typeface="Calibri" panose="020F0502020204030204" pitchFamily="34" charset="0"/>
+              </a:defRPr>
+            </a:lvl5pPr>
+            <a:lvl6pPr marL="2514600" indent="-228600" eaLnBrk="0" fontAlgn="base" hangingPunct="0">
+              <a:spcBef>
+                <a:spcPct val="0"/>
+              </a:spcBef>
+              <a:spcAft>
+                <a:spcPct val="0"/>
+              </a:spcAft>
+              <a:defRPr>
+                <a:solidFill>
+                  <a:schemeClr val="tx1"/>
+                </a:solidFill>
+                <a:latin typeface="Calibri" panose="020F0502020204030204" pitchFamily="34" charset="0"/>
+              </a:defRPr>
+            </a:lvl6pPr>
+            <a:lvl7pPr marL="2971800" indent="-228600" eaLnBrk="0" fontAlgn="base" hangingPunct="0">
+              <a:spcBef>
+                <a:spcPct val="0"/>
+              </a:spcBef>
+              <a:spcAft>
+                <a:spcPct val="0"/>
+              </a:spcAft>
+              <a:defRPr>
+                <a:solidFill>
+                  <a:schemeClr val="tx1"/>
+                </a:solidFill>
+                <a:latin typeface="Calibri" panose="020F0502020204030204" pitchFamily="34" charset="0"/>
+              </a:defRPr>
+            </a:lvl7pPr>
+            <a:lvl8pPr marL="3429000" indent="-228600" eaLnBrk="0" fontAlgn="base" hangingPunct="0">
+              <a:spcBef>
+                <a:spcPct val="0"/>
+              </a:spcBef>
+              <a:spcAft>
+                <a:spcPct val="0"/>
+              </a:spcAft>
+              <a:defRPr>
+                <a:solidFill>
+                  <a:schemeClr val="tx1"/>
+                </a:solidFill>
+                <a:latin typeface="Calibri" panose="020F0502020204030204" pitchFamily="34" charset="0"/>
+              </a:defRPr>
+            </a:lvl8pPr>
+            <a:lvl9pPr marL="3886200" indent="-228600" eaLnBrk="0" fontAlgn="base" hangingPunct="0">
+              <a:spcBef>
+                <a:spcPct val="0"/>
+              </a:spcBef>
+              <a:spcAft>
+                <a:spcPct val="0"/>
+              </a:spcAft>
+              <a:defRPr>
+                <a:solidFill>
+                  <a:schemeClr val="tx1"/>
+                </a:solidFill>
+                <a:latin typeface="Calibri" panose="020F0502020204030204" pitchFamily="34" charset="0"/>
+              </a:defRPr>
+            </a:lvl9pPr>
+          </a:lstStyle>
+          <a:p>
+            <a:pPr algn="ctr" eaLnBrk="1" hangingPunct="1"/>
+            <a:r>
+              <a:rPr lang="en-US" altLang="en-US" sz="1100" dirty="0">
+                <a:latin typeface="Arial" panose="020B0604020202020204" pitchFamily="34" charset="0"/>
+                <a:ea typeface="Amazon Ember" panose="020B0603020204020204" pitchFamily="34" charset="0"/>
+                <a:cs typeface="Arial" panose="020B0604020202020204" pitchFamily="34" charset="0"/>
+              </a:rPr>
+              <a:t>Rule</a:t>
+            </a:r>
+          </a:p>
+        </p:txBody>
+      </p:sp>
+      <p:sp>
+        <p:nvSpPr>
+          <p:cNvPr id="14" name="TextBox 17">
+            <a:extLst>
+              <a:ext uri="{FF2B5EF4-FFF2-40B4-BE49-F238E27FC236}">
+                <a16:creationId xmlns:a16="http://schemas.microsoft.com/office/drawing/2014/main" id="{B5BD3B4A-2E6C-5EE1-8CD5-6125568EA355}"/>
+              </a:ext>
+            </a:extLst>
+          </p:cNvPr>
+          <p:cNvSpPr txBox="1">
+            <a:spLocks noChangeArrowheads="1"/>
+          </p:cNvSpPr>
+          <p:nvPr/>
+        </p:nvSpPr>
+        <p:spPr bwMode="auto">
+          <a:xfrm>
+            <a:off x="5363065" y="2384429"/>
+            <a:ext cx="1362074" cy="261610"/>
+          </a:xfrm>
+          <a:prstGeom prst="rect">
+            <a:avLst/>
+          </a:prstGeom>
+          <a:noFill/>
+          <a:ln>
+            <a:noFill/>
+          </a:ln>
+          <a:extLst>
+            <a:ext uri="{909E8E84-426E-40DD-AFC4-6F175D3DCCD1}">
+              <a14:hiddenFill xmlns:a14="http://schemas.microsoft.com/office/drawing/2010/main">
+                <a:solidFill>
+                  <a:srgbClr val="FFFFFF"/>
+                </a:solidFill>
+              </a14:hiddenFill>
+            </a:ext>
+            <a:ext uri="{91240B29-F687-4F45-9708-019B960494DF}">
+              <a14:hiddenLine xmlns:a14="http://schemas.microsoft.com/office/drawing/2010/main" w="9525">
+                <a:solidFill>
+                  <a:srgbClr val="000000"/>
+                </a:solidFill>
+                <a:miter lim="800000"/>
+                <a:headEnd/>
+                <a:tailEnd/>
+              </a14:hiddenLine>
+            </a:ext>
+          </a:extLst>
+        </p:spPr>
+        <p:txBody>
+          <a:bodyPr wrap="square">
+            <a:spAutoFit/>
+          </a:bodyPr>
+          <a:lstStyle>
+            <a:lvl1pPr>
+              <a:defRPr>
+                <a:solidFill>
+                  <a:schemeClr val="tx1"/>
+                </a:solidFill>
+                <a:latin typeface="Calibri" panose="020F0502020204030204" pitchFamily="34" charset="0"/>
+              </a:defRPr>
+            </a:lvl1pPr>
+            <a:lvl2pPr marL="742950" indent="-285750">
+              <a:defRPr>
+                <a:solidFill>
+                  <a:schemeClr val="tx1"/>
+                </a:solidFill>
+                <a:latin typeface="Calibri" panose="020F0502020204030204" pitchFamily="34" charset="0"/>
+              </a:defRPr>
+            </a:lvl2pPr>
+            <a:lvl3pPr marL="1143000" indent="-228600">
+              <a:defRPr>
+                <a:solidFill>
+                  <a:schemeClr val="tx1"/>
+                </a:solidFill>
+                <a:latin typeface="Calibri" panose="020F0502020204030204" pitchFamily="34" charset="0"/>
+              </a:defRPr>
+            </a:lvl3pPr>
+            <a:lvl4pPr marL="1600200" indent="-228600">
+              <a:defRPr>
+                <a:solidFill>
+                  <a:schemeClr val="tx1"/>
+                </a:solidFill>
+                <a:latin typeface="Calibri" panose="020F0502020204030204" pitchFamily="34" charset="0"/>
+              </a:defRPr>
+            </a:lvl4pPr>
+            <a:lvl5pPr marL="2057400" indent="-228600">
+              <a:defRPr>
+                <a:solidFill>
+                  <a:schemeClr val="tx1"/>
+                </a:solidFill>
+                <a:latin typeface="Calibri" panose="020F0502020204030204" pitchFamily="34" charset="0"/>
+              </a:defRPr>
+            </a:lvl5pPr>
+            <a:lvl6pPr marL="2514600" indent="-228600" eaLnBrk="0" fontAlgn="base" hangingPunct="0">
+              <a:spcBef>
+                <a:spcPct val="0"/>
+              </a:spcBef>
+              <a:spcAft>
+                <a:spcPct val="0"/>
+              </a:spcAft>
+              <a:defRPr>
+                <a:solidFill>
+                  <a:schemeClr val="tx1"/>
+                </a:solidFill>
+                <a:latin typeface="Calibri" panose="020F0502020204030204" pitchFamily="34" charset="0"/>
+              </a:defRPr>
+            </a:lvl6pPr>
+            <a:lvl7pPr marL="2971800" indent="-228600" eaLnBrk="0" fontAlgn="base" hangingPunct="0">
+              <a:spcBef>
+                <a:spcPct val="0"/>
+              </a:spcBef>
+              <a:spcAft>
+                <a:spcPct val="0"/>
+              </a:spcAft>
+              <a:defRPr>
+                <a:solidFill>
+                  <a:schemeClr val="tx1"/>
+                </a:solidFill>
+                <a:latin typeface="Calibri" panose="020F0502020204030204" pitchFamily="34" charset="0"/>
+              </a:defRPr>
+            </a:lvl7pPr>
+            <a:lvl8pPr marL="3429000" indent="-228600" eaLnBrk="0" fontAlgn="base" hangingPunct="0">
+              <a:spcBef>
+                <a:spcPct val="0"/>
+              </a:spcBef>
+              <a:spcAft>
+                <a:spcPct val="0"/>
+              </a:spcAft>
+              <a:defRPr>
+                <a:solidFill>
+                  <a:schemeClr val="tx1"/>
+                </a:solidFill>
+                <a:latin typeface="Calibri" panose="020F0502020204030204" pitchFamily="34" charset="0"/>
+              </a:defRPr>
+            </a:lvl8pPr>
+            <a:lvl9pPr marL="3886200" indent="-228600" eaLnBrk="0" fontAlgn="base" hangingPunct="0">
+              <a:spcBef>
+                <a:spcPct val="0"/>
+              </a:spcBef>
+              <a:spcAft>
+                <a:spcPct val="0"/>
+              </a:spcAft>
+              <a:defRPr>
+                <a:solidFill>
+                  <a:schemeClr val="tx1"/>
+                </a:solidFill>
+                <a:latin typeface="Calibri" panose="020F0502020204030204" pitchFamily="34" charset="0"/>
+              </a:defRPr>
+            </a:lvl9pPr>
+          </a:lstStyle>
+          <a:p>
+            <a:pPr algn="ctr" eaLnBrk="1" hangingPunct="1"/>
+            <a:r>
+              <a:rPr lang="en-US" altLang="en-US" sz="1100" dirty="0">
+                <a:latin typeface="Arial" panose="020B0604020202020204" pitchFamily="34" charset="0"/>
+                <a:ea typeface="Amazon Ember" panose="020B0603020204020204" pitchFamily="34" charset="0"/>
+                <a:cs typeface="Arial" panose="020B0604020202020204" pitchFamily="34" charset="0"/>
+              </a:rPr>
+              <a:t>Lambda function</a:t>
+            </a:r>
+          </a:p>
+        </p:txBody>
+      </p:sp>
+      <p:pic>
+        <p:nvPicPr>
+          <p:cNvPr id="15" name="Graphic 13">
+            <a:extLst>
+              <a:ext uri="{FF2B5EF4-FFF2-40B4-BE49-F238E27FC236}">
+                <a16:creationId xmlns:a16="http://schemas.microsoft.com/office/drawing/2014/main" id="{B8586E4D-BBA0-CE3F-5241-AF85C1EE4CB4}"/>
+              </a:ext>
+            </a:extLst>
+          </p:cNvPr>
+          <p:cNvPicPr>
+            <a:picLocks noChangeAspect="1" noChangeArrowheads="1"/>
+          </p:cNvPicPr>
+          <p:nvPr/>
+        </p:nvPicPr>
+        <p:blipFill>
+          <a:blip r:embed="rId6">
+            <a:extLst>
+              <a:ext uri="{28A0092B-C50C-407E-A947-70E740481C1C}">
+                <a14:useLocalDpi xmlns:a14="http://schemas.microsoft.com/office/drawing/2010/main" val="0"/>
+              </a:ext>
+            </a:extLst>
+          </a:blip>
+          <a:srcRect/>
+          <a:stretch>
+            <a:fillRect/>
+          </a:stretch>
+        </p:blipFill>
+        <p:spPr bwMode="auto">
+          <a:xfrm>
+            <a:off x="5823991" y="1922176"/>
+            <a:ext cx="457200" cy="457200"/>
+          </a:xfrm>
+          <a:prstGeom prst="rect">
+            <a:avLst/>
+          </a:prstGeom>
+          <a:noFill/>
+          <a:ln>
+            <a:noFill/>
+          </a:ln>
+          <a:extLst>
+            <a:ext uri="{909E8E84-426E-40DD-AFC4-6F175D3DCCD1}">
+              <a14:hiddenFill xmlns:a14="http://schemas.microsoft.com/office/drawing/2010/main">
+                <a:solidFill>
+                  <a:srgbClr val="FFFFFF"/>
+                </a:solidFill>
+              </a14:hiddenFill>
+            </a:ext>
+            <a:ext uri="{91240B29-F687-4F45-9708-019B960494DF}">
+              <a14:hiddenLine xmlns:a14="http://schemas.microsoft.com/office/drawing/2010/main" w="9525">
+                <a:solidFill>
+                  <a:srgbClr val="000000"/>
+                </a:solidFill>
+                <a:miter lim="800000"/>
+                <a:headEnd/>
+                <a:tailEnd/>
+              </a14:hiddenLine>
+            </a:ext>
+          </a:extLst>
+        </p:spPr>
+      </p:pic>
+      <p:sp>
+        <p:nvSpPr>
+          <p:cNvPr id="16" name="TextBox 25">
+            <a:extLst>
+              <a:ext uri="{FF2B5EF4-FFF2-40B4-BE49-F238E27FC236}">
+                <a16:creationId xmlns:a16="http://schemas.microsoft.com/office/drawing/2014/main" id="{F2B753BF-2F31-F630-F5E9-7EEBD56C8C89}"/>
+              </a:ext>
+            </a:extLst>
+          </p:cNvPr>
+          <p:cNvSpPr txBox="1">
+            <a:spLocks noChangeArrowheads="1"/>
+          </p:cNvSpPr>
+          <p:nvPr/>
+        </p:nvSpPr>
+        <p:spPr bwMode="auto">
+          <a:xfrm>
+            <a:off x="6609686" y="2384429"/>
+            <a:ext cx="1385885" cy="261610"/>
+          </a:xfrm>
+          <a:prstGeom prst="rect">
+            <a:avLst/>
+          </a:prstGeom>
+          <a:noFill/>
+          <a:ln>
+            <a:noFill/>
+          </a:ln>
+          <a:extLst>
+            <a:ext uri="{909E8E84-426E-40DD-AFC4-6F175D3DCCD1}">
+              <a14:hiddenFill xmlns:a14="http://schemas.microsoft.com/office/drawing/2010/main">
+                <a:solidFill>
+                  <a:srgbClr val="FFFFFF"/>
+                </a:solidFill>
+              </a14:hiddenFill>
+            </a:ext>
+            <a:ext uri="{91240B29-F687-4F45-9708-019B960494DF}">
+              <a14:hiddenLine xmlns:a14="http://schemas.microsoft.com/office/drawing/2010/main" w="9525">
+                <a:solidFill>
+                  <a:srgbClr val="000000"/>
+                </a:solidFill>
+                <a:miter lim="800000"/>
+                <a:headEnd/>
+                <a:tailEnd/>
+              </a14:hiddenLine>
+            </a:ext>
+          </a:extLst>
+        </p:spPr>
+        <p:txBody>
+          <a:bodyPr wrap="square">
+            <a:spAutoFit/>
+          </a:bodyPr>
+          <a:lstStyle>
+            <a:lvl1pPr>
+              <a:defRPr>
+                <a:solidFill>
+                  <a:schemeClr val="tx1"/>
+                </a:solidFill>
+                <a:latin typeface="Calibri" panose="020F0502020204030204" pitchFamily="34" charset="0"/>
+              </a:defRPr>
+            </a:lvl1pPr>
+            <a:lvl2pPr marL="742950" indent="-285750">
+              <a:defRPr>
+                <a:solidFill>
+                  <a:schemeClr val="tx1"/>
+                </a:solidFill>
+                <a:latin typeface="Calibri" panose="020F0502020204030204" pitchFamily="34" charset="0"/>
+              </a:defRPr>
+            </a:lvl2pPr>
+            <a:lvl3pPr marL="1143000" indent="-228600">
+              <a:defRPr>
+                <a:solidFill>
+                  <a:schemeClr val="tx1"/>
+                </a:solidFill>
+                <a:latin typeface="Calibri" panose="020F0502020204030204" pitchFamily="34" charset="0"/>
+              </a:defRPr>
+            </a:lvl3pPr>
+            <a:lvl4pPr marL="1600200" indent="-228600">
+              <a:defRPr>
+                <a:solidFill>
+                  <a:schemeClr val="tx1"/>
+                </a:solidFill>
+                <a:latin typeface="Calibri" panose="020F0502020204030204" pitchFamily="34" charset="0"/>
+              </a:defRPr>
+            </a:lvl4pPr>
+            <a:lvl5pPr marL="2057400" indent="-228600">
+              <a:defRPr>
+                <a:solidFill>
+                  <a:schemeClr val="tx1"/>
+                </a:solidFill>
+                <a:latin typeface="Calibri" panose="020F0502020204030204" pitchFamily="34" charset="0"/>
+              </a:defRPr>
+            </a:lvl5pPr>
+            <a:lvl6pPr marL="2514600" indent="-228600" eaLnBrk="0" fontAlgn="base" hangingPunct="0">
+              <a:spcBef>
+                <a:spcPct val="0"/>
+              </a:spcBef>
+              <a:spcAft>
+                <a:spcPct val="0"/>
+              </a:spcAft>
+              <a:defRPr>
+                <a:solidFill>
+                  <a:schemeClr val="tx1"/>
+                </a:solidFill>
+                <a:latin typeface="Calibri" panose="020F0502020204030204" pitchFamily="34" charset="0"/>
+              </a:defRPr>
+            </a:lvl6pPr>
+            <a:lvl7pPr marL="2971800" indent="-228600" eaLnBrk="0" fontAlgn="base" hangingPunct="0">
+              <a:spcBef>
+                <a:spcPct val="0"/>
+              </a:spcBef>
+              <a:spcAft>
+                <a:spcPct val="0"/>
+              </a:spcAft>
+              <a:defRPr>
+                <a:solidFill>
+                  <a:schemeClr val="tx1"/>
+                </a:solidFill>
+                <a:latin typeface="Calibri" panose="020F0502020204030204" pitchFamily="34" charset="0"/>
+              </a:defRPr>
+            </a:lvl7pPr>
+            <a:lvl8pPr marL="3429000" indent="-228600" eaLnBrk="0" fontAlgn="base" hangingPunct="0">
+              <a:spcBef>
+                <a:spcPct val="0"/>
+              </a:spcBef>
+              <a:spcAft>
+                <a:spcPct val="0"/>
+              </a:spcAft>
+              <a:defRPr>
+                <a:solidFill>
+                  <a:schemeClr val="tx1"/>
+                </a:solidFill>
+                <a:latin typeface="Calibri" panose="020F0502020204030204" pitchFamily="34" charset="0"/>
+              </a:defRPr>
+            </a:lvl8pPr>
+            <a:lvl9pPr marL="3886200" indent="-228600" eaLnBrk="0" fontAlgn="base" hangingPunct="0">
+              <a:spcBef>
+                <a:spcPct val="0"/>
+              </a:spcBef>
+              <a:spcAft>
+                <a:spcPct val="0"/>
+              </a:spcAft>
+              <a:defRPr>
+                <a:solidFill>
+                  <a:schemeClr val="tx1"/>
+                </a:solidFill>
+                <a:latin typeface="Calibri" panose="020F0502020204030204" pitchFamily="34" charset="0"/>
+              </a:defRPr>
+            </a:lvl9pPr>
+          </a:lstStyle>
+          <a:p>
+            <a:pPr algn="ctr" eaLnBrk="1" hangingPunct="1"/>
+            <a:r>
+              <a:rPr lang="en-US" altLang="en-US" sz="1100" dirty="0">
+                <a:latin typeface="Arial" panose="020B0604020202020204" pitchFamily="34" charset="0"/>
+                <a:ea typeface="Amazon Ember" panose="020B0603020204020204" pitchFamily="34" charset="0"/>
+                <a:cs typeface="Arial" panose="020B0604020202020204" pitchFamily="34" charset="0"/>
+              </a:rPr>
+              <a:t>Topic</a:t>
+            </a:r>
+          </a:p>
+        </p:txBody>
+      </p:sp>
+      <p:pic>
+        <p:nvPicPr>
+          <p:cNvPr id="17" name="Graphic 17">
+            <a:extLst>
+              <a:ext uri="{FF2B5EF4-FFF2-40B4-BE49-F238E27FC236}">
+                <a16:creationId xmlns:a16="http://schemas.microsoft.com/office/drawing/2014/main" id="{497BA7B2-C9BA-3A9D-5DA1-A94AA92DD831}"/>
+              </a:ext>
+            </a:extLst>
+          </p:cNvPr>
+          <p:cNvPicPr>
+            <a:picLocks noChangeAspect="1" noChangeArrowheads="1"/>
+          </p:cNvPicPr>
+          <p:nvPr/>
+        </p:nvPicPr>
+        <p:blipFill>
+          <a:blip r:embed="rId7">
+            <a:extLst>
+              <a:ext uri="{28A0092B-C50C-407E-A947-70E740481C1C}">
+                <a14:useLocalDpi xmlns:a14="http://schemas.microsoft.com/office/drawing/2010/main" val="0"/>
+              </a:ext>
+            </a:extLst>
+          </a:blip>
+          <a:srcRect/>
+          <a:stretch>
+            <a:fillRect/>
+          </a:stretch>
+        </p:blipFill>
+        <p:spPr bwMode="auto">
+          <a:xfrm>
+            <a:off x="7071715" y="1922176"/>
+            <a:ext cx="457200" cy="457200"/>
+          </a:xfrm>
+          <a:prstGeom prst="rect">
+            <a:avLst/>
+          </a:prstGeom>
+          <a:noFill/>
+          <a:ln>
+            <a:noFill/>
+          </a:ln>
+          <a:extLst>
+            <a:ext uri="{909E8E84-426E-40DD-AFC4-6F175D3DCCD1}">
+              <a14:hiddenFill xmlns:a14="http://schemas.microsoft.com/office/drawing/2010/main">
+                <a:solidFill>
+                  <a:srgbClr val="FFFFFF"/>
+                </a:solidFill>
+              </a14:hiddenFill>
+            </a:ext>
+            <a:ext uri="{91240B29-F687-4F45-9708-019B960494DF}">
+              <a14:hiddenLine xmlns:a14="http://schemas.microsoft.com/office/drawing/2010/main" w="9525">
+                <a:solidFill>
+                  <a:srgbClr val="000000"/>
+                </a:solidFill>
+                <a:miter lim="800000"/>
+                <a:headEnd/>
+                <a:tailEnd/>
+              </a14:hiddenLine>
+            </a:ext>
+          </a:extLst>
+        </p:spPr>
+      </p:pic>
+      <p:sp>
+        <p:nvSpPr>
+          <p:cNvPr id="18" name="TextBox 18">
+            <a:extLst>
+              <a:ext uri="{FF2B5EF4-FFF2-40B4-BE49-F238E27FC236}">
+                <a16:creationId xmlns:a16="http://schemas.microsoft.com/office/drawing/2014/main" id="{20E2458E-A606-E3C8-02A6-7C2547D135F3}"/>
+              </a:ext>
+            </a:extLst>
+          </p:cNvPr>
+          <p:cNvSpPr txBox="1">
+            <a:spLocks noChangeArrowheads="1"/>
+          </p:cNvSpPr>
+          <p:nvPr/>
+        </p:nvSpPr>
+        <p:spPr bwMode="auto">
+          <a:xfrm>
+            <a:off x="8037184" y="2384429"/>
+            <a:ext cx="1385885" cy="261610"/>
+          </a:xfrm>
+          <a:prstGeom prst="rect">
+            <a:avLst/>
+          </a:prstGeom>
+          <a:noFill/>
+          <a:ln>
+            <a:noFill/>
+          </a:ln>
+          <a:extLst>
+            <a:ext uri="{909E8E84-426E-40DD-AFC4-6F175D3DCCD1}">
+              <a14:hiddenFill xmlns:a14="http://schemas.microsoft.com/office/drawing/2010/main">
+                <a:solidFill>
+                  <a:srgbClr val="FFFFFF"/>
+                </a:solidFill>
+              </a14:hiddenFill>
+            </a:ext>
+            <a:ext uri="{91240B29-F687-4F45-9708-019B960494DF}">
+              <a14:hiddenLine xmlns:a14="http://schemas.microsoft.com/office/drawing/2010/main" w="9525">
+                <a:solidFill>
+                  <a:srgbClr val="000000"/>
+                </a:solidFill>
+                <a:miter lim="800000"/>
+                <a:headEnd/>
+                <a:tailEnd/>
+              </a14:hiddenLine>
+            </a:ext>
+          </a:extLst>
+        </p:spPr>
+        <p:txBody>
+          <a:bodyPr wrap="square">
+            <a:spAutoFit/>
+          </a:bodyPr>
+          <a:lstStyle>
+            <a:lvl1pPr>
+              <a:defRPr>
+                <a:solidFill>
+                  <a:schemeClr val="tx1"/>
+                </a:solidFill>
+                <a:latin typeface="Calibri" panose="020F0502020204030204" pitchFamily="34" charset="0"/>
+              </a:defRPr>
+            </a:lvl1pPr>
+            <a:lvl2pPr marL="742950" indent="-285750">
+              <a:defRPr>
+                <a:solidFill>
+                  <a:schemeClr val="tx1"/>
+                </a:solidFill>
+                <a:latin typeface="Calibri" panose="020F0502020204030204" pitchFamily="34" charset="0"/>
+              </a:defRPr>
+            </a:lvl2pPr>
+            <a:lvl3pPr marL="1143000" indent="-228600">
+              <a:defRPr>
+                <a:solidFill>
+                  <a:schemeClr val="tx1"/>
+                </a:solidFill>
+                <a:latin typeface="Calibri" panose="020F0502020204030204" pitchFamily="34" charset="0"/>
+              </a:defRPr>
+            </a:lvl3pPr>
+            <a:lvl4pPr marL="1600200" indent="-228600">
+              <a:defRPr>
+                <a:solidFill>
+                  <a:schemeClr val="tx1"/>
+                </a:solidFill>
+                <a:latin typeface="Calibri" panose="020F0502020204030204" pitchFamily="34" charset="0"/>
+              </a:defRPr>
+            </a:lvl4pPr>
+            <a:lvl5pPr marL="2057400" indent="-228600">
+              <a:defRPr>
+                <a:solidFill>
+                  <a:schemeClr val="tx1"/>
+                </a:solidFill>
+                <a:latin typeface="Calibri" panose="020F0502020204030204" pitchFamily="34" charset="0"/>
+              </a:defRPr>
+            </a:lvl5pPr>
+            <a:lvl6pPr marL="2514600" indent="-228600" eaLnBrk="0" fontAlgn="base" hangingPunct="0">
+              <a:spcBef>
+                <a:spcPct val="0"/>
+              </a:spcBef>
+              <a:spcAft>
+                <a:spcPct val="0"/>
+              </a:spcAft>
+              <a:defRPr>
+                <a:solidFill>
+                  <a:schemeClr val="tx1"/>
+                </a:solidFill>
+                <a:latin typeface="Calibri" panose="020F0502020204030204" pitchFamily="34" charset="0"/>
+              </a:defRPr>
+            </a:lvl6pPr>
+            <a:lvl7pPr marL="2971800" indent="-228600" eaLnBrk="0" fontAlgn="base" hangingPunct="0">
+              <a:spcBef>
+                <a:spcPct val="0"/>
+              </a:spcBef>
+              <a:spcAft>
+                <a:spcPct val="0"/>
+              </a:spcAft>
+              <a:defRPr>
+                <a:solidFill>
+                  <a:schemeClr val="tx1"/>
+                </a:solidFill>
+                <a:latin typeface="Calibri" panose="020F0502020204030204" pitchFamily="34" charset="0"/>
+              </a:defRPr>
+            </a:lvl7pPr>
+            <a:lvl8pPr marL="3429000" indent="-228600" eaLnBrk="0" fontAlgn="base" hangingPunct="0">
+              <a:spcBef>
+                <a:spcPct val="0"/>
+              </a:spcBef>
+              <a:spcAft>
+                <a:spcPct val="0"/>
+              </a:spcAft>
+              <a:defRPr>
+                <a:solidFill>
+                  <a:schemeClr val="tx1"/>
+                </a:solidFill>
+                <a:latin typeface="Calibri" panose="020F0502020204030204" pitchFamily="34" charset="0"/>
+              </a:defRPr>
+            </a:lvl8pPr>
+            <a:lvl9pPr marL="3886200" indent="-228600" eaLnBrk="0" fontAlgn="base" hangingPunct="0">
+              <a:spcBef>
+                <a:spcPct val="0"/>
+              </a:spcBef>
+              <a:spcAft>
+                <a:spcPct val="0"/>
+              </a:spcAft>
+              <a:defRPr>
+                <a:solidFill>
+                  <a:schemeClr val="tx1"/>
+                </a:solidFill>
+                <a:latin typeface="Calibri" panose="020F0502020204030204" pitchFamily="34" charset="0"/>
+              </a:defRPr>
+            </a:lvl9pPr>
+          </a:lstStyle>
+          <a:p>
+            <a:pPr algn="ctr" eaLnBrk="1" hangingPunct="1"/>
+            <a:r>
+              <a:rPr lang="en-US" altLang="en-US" sz="1100" dirty="0">
+                <a:latin typeface="Arial" panose="020B0604020202020204" pitchFamily="34" charset="0"/>
+                <a:ea typeface="Amazon Ember" panose="020B0603020204020204" pitchFamily="34" charset="0"/>
+                <a:cs typeface="Arial" panose="020B0604020202020204" pitchFamily="34" charset="0"/>
+              </a:rPr>
+              <a:t>Email notification</a:t>
+            </a:r>
+          </a:p>
+        </p:txBody>
+      </p:sp>
+      <p:pic>
+        <p:nvPicPr>
+          <p:cNvPr id="19" name="Graphic 6">
+            <a:extLst>
+              <a:ext uri="{FF2B5EF4-FFF2-40B4-BE49-F238E27FC236}">
+                <a16:creationId xmlns:a16="http://schemas.microsoft.com/office/drawing/2014/main" id="{52C59FF2-E83D-7391-3E14-06D44ED260C4}"/>
+              </a:ext>
+            </a:extLst>
+          </p:cNvPr>
+          <p:cNvPicPr>
+            <a:picLocks noChangeAspect="1" noChangeArrowheads="1"/>
+          </p:cNvPicPr>
+          <p:nvPr/>
+        </p:nvPicPr>
+        <p:blipFill>
+          <a:blip r:embed="rId8">
+            <a:extLst>
+              <a:ext uri="{28A0092B-C50C-407E-A947-70E740481C1C}">
+                <a14:useLocalDpi xmlns:a14="http://schemas.microsoft.com/office/drawing/2010/main" val="0"/>
+              </a:ext>
+            </a:extLst>
+          </a:blip>
+          <a:srcRect/>
+          <a:stretch>
+            <a:fillRect/>
+          </a:stretch>
+        </p:blipFill>
+        <p:spPr bwMode="auto">
+          <a:xfrm>
+            <a:off x="8499213" y="1922176"/>
+            <a:ext cx="457200" cy="457200"/>
+          </a:xfrm>
+          <a:prstGeom prst="rect">
+            <a:avLst/>
+          </a:prstGeom>
+          <a:noFill/>
+          <a:ln>
+            <a:noFill/>
+          </a:ln>
+          <a:extLst>
+            <a:ext uri="{909E8E84-426E-40DD-AFC4-6F175D3DCCD1}">
+              <a14:hiddenFill xmlns:a14="http://schemas.microsoft.com/office/drawing/2010/main">
+                <a:solidFill>
+                  <a:srgbClr val="FFFFFF"/>
+                </a:solidFill>
+              </a14:hiddenFill>
+            </a:ext>
+            <a:ext uri="{91240B29-F687-4F45-9708-019B960494DF}">
+              <a14:hiddenLine xmlns:a14="http://schemas.microsoft.com/office/drawing/2010/main" w="9525">
+                <a:solidFill>
+                  <a:srgbClr val="000000"/>
+                </a:solidFill>
+                <a:miter lim="800000"/>
+                <a:headEnd/>
+                <a:tailEnd/>
+              </a14:hiddenLine>
+            </a:ext>
+          </a:extLst>
+        </p:spPr>
+      </p:pic>
+      <p:pic>
+        <p:nvPicPr>
+          <p:cNvPr id="22" name="Graphic 18">
+            <a:extLst>
+              <a:ext uri="{FF2B5EF4-FFF2-40B4-BE49-F238E27FC236}">
+                <a16:creationId xmlns:a16="http://schemas.microsoft.com/office/drawing/2014/main" id="{C80518CB-2864-6DB4-C96D-0A150A9F0632}"/>
+              </a:ext>
+            </a:extLst>
+          </p:cNvPr>
+          <p:cNvPicPr>
+            <a:picLocks noChangeAspect="1" noChangeArrowheads="1"/>
+          </p:cNvPicPr>
+          <p:nvPr/>
+        </p:nvPicPr>
+        <p:blipFill>
+          <a:blip r:embed="rId9">
+            <a:extLst>
+              <a:ext uri="{28A0092B-C50C-407E-A947-70E740481C1C}">
+                <a14:useLocalDpi xmlns:a14="http://schemas.microsoft.com/office/drawing/2010/main" val="0"/>
+              </a:ext>
+            </a:extLst>
+          </a:blip>
+          <a:srcRect/>
+          <a:stretch>
+            <a:fillRect/>
+          </a:stretch>
+        </p:blipFill>
+        <p:spPr bwMode="auto">
+          <a:xfrm>
+            <a:off x="3503059" y="5378562"/>
+            <a:ext cx="395048" cy="395048"/>
+          </a:xfrm>
+          <a:prstGeom prst="rect">
+            <a:avLst/>
+          </a:prstGeom>
+          <a:noFill/>
+          <a:ln>
+            <a:noFill/>
+          </a:ln>
+          <a:extLst>
+            <a:ext uri="{909E8E84-426E-40DD-AFC4-6F175D3DCCD1}">
+              <a14:hiddenFill xmlns:a14="http://schemas.microsoft.com/office/drawing/2010/main">
+                <a:solidFill>
+                  <a:srgbClr val="FFFFFF"/>
+                </a:solidFill>
+              </a14:hiddenFill>
+            </a:ext>
+            <a:ext uri="{91240B29-F687-4F45-9708-019B960494DF}">
+              <a14:hiddenLine xmlns:a14="http://schemas.microsoft.com/office/drawing/2010/main" w="9525">
+                <a:solidFill>
+                  <a:srgbClr val="000000"/>
+                </a:solidFill>
+                <a:miter lim="800000"/>
+                <a:headEnd/>
+                <a:tailEnd/>
+              </a14:hiddenLine>
+            </a:ext>
+          </a:extLst>
+        </p:spPr>
+      </p:pic>
+      <p:sp>
+        <p:nvSpPr>
+          <p:cNvPr id="23" name="TextBox 24">
+            <a:extLst>
+              <a:ext uri="{FF2B5EF4-FFF2-40B4-BE49-F238E27FC236}">
+                <a16:creationId xmlns:a16="http://schemas.microsoft.com/office/drawing/2014/main" id="{A4446543-C779-7E3C-F2D1-C161B515C770}"/>
+              </a:ext>
+            </a:extLst>
+          </p:cNvPr>
+          <p:cNvSpPr txBox="1">
+            <a:spLocks noChangeArrowheads="1"/>
+          </p:cNvSpPr>
+          <p:nvPr/>
+        </p:nvSpPr>
+        <p:spPr bwMode="auto">
+          <a:xfrm>
+            <a:off x="2549646" y="5800715"/>
+            <a:ext cx="2290762" cy="261610"/>
+          </a:xfrm>
+          <a:prstGeom prst="rect">
+            <a:avLst/>
+          </a:prstGeom>
+          <a:noFill/>
+          <a:ln>
+            <a:noFill/>
+          </a:ln>
+          <a:extLst>
+            <a:ext uri="{909E8E84-426E-40DD-AFC4-6F175D3DCCD1}">
+              <a14:hiddenFill xmlns:a14="http://schemas.microsoft.com/office/drawing/2010/main">
+                <a:solidFill>
+                  <a:srgbClr val="FFFFFF"/>
+                </a:solidFill>
+              </a14:hiddenFill>
+            </a:ext>
+            <a:ext uri="{91240B29-F687-4F45-9708-019B960494DF}">
+              <a14:hiddenLine xmlns:a14="http://schemas.microsoft.com/office/drawing/2010/main" w="9525">
+                <a:solidFill>
+                  <a:srgbClr val="000000"/>
+                </a:solidFill>
+                <a:miter lim="800000"/>
+                <a:headEnd/>
+                <a:tailEnd/>
+              </a14:hiddenLine>
+            </a:ext>
+          </a:extLst>
+        </p:spPr>
+        <p:txBody>
+          <a:bodyPr>
+            <a:spAutoFit/>
+          </a:bodyPr>
+          <a:lstStyle>
+            <a:lvl1pPr>
+              <a:defRPr>
+                <a:solidFill>
+                  <a:schemeClr val="tx1"/>
+                </a:solidFill>
+                <a:latin typeface="Calibri" panose="020F0502020204030204" pitchFamily="34" charset="0"/>
+              </a:defRPr>
+            </a:lvl1pPr>
+            <a:lvl2pPr marL="742950" indent="-285750">
+              <a:defRPr>
+                <a:solidFill>
+                  <a:schemeClr val="tx1"/>
+                </a:solidFill>
+                <a:latin typeface="Calibri" panose="020F0502020204030204" pitchFamily="34" charset="0"/>
+              </a:defRPr>
+            </a:lvl2pPr>
+            <a:lvl3pPr marL="1143000" indent="-228600">
+              <a:defRPr>
+                <a:solidFill>
+                  <a:schemeClr val="tx1"/>
+                </a:solidFill>
+                <a:latin typeface="Calibri" panose="020F0502020204030204" pitchFamily="34" charset="0"/>
+              </a:defRPr>
+            </a:lvl3pPr>
+            <a:lvl4pPr marL="1600200" indent="-228600">
+              <a:defRPr>
+                <a:solidFill>
+                  <a:schemeClr val="tx1"/>
+                </a:solidFill>
+                <a:latin typeface="Calibri" panose="020F0502020204030204" pitchFamily="34" charset="0"/>
+              </a:defRPr>
+            </a:lvl4pPr>
+            <a:lvl5pPr marL="2057400" indent="-228600">
+              <a:defRPr>
+                <a:solidFill>
+                  <a:schemeClr val="tx1"/>
+                </a:solidFill>
+                <a:latin typeface="Calibri" panose="020F0502020204030204" pitchFamily="34" charset="0"/>
+              </a:defRPr>
+            </a:lvl5pPr>
+            <a:lvl6pPr marL="2514600" indent="-228600" eaLnBrk="0" fontAlgn="base" hangingPunct="0">
+              <a:spcBef>
+                <a:spcPct val="0"/>
+              </a:spcBef>
+              <a:spcAft>
+                <a:spcPct val="0"/>
+              </a:spcAft>
+              <a:defRPr>
+                <a:solidFill>
+                  <a:schemeClr val="tx1"/>
+                </a:solidFill>
+                <a:latin typeface="Calibri" panose="020F0502020204030204" pitchFamily="34" charset="0"/>
+              </a:defRPr>
+            </a:lvl6pPr>
+            <a:lvl7pPr marL="2971800" indent="-228600" eaLnBrk="0" fontAlgn="base" hangingPunct="0">
+              <a:spcBef>
+                <a:spcPct val="0"/>
+              </a:spcBef>
+              <a:spcAft>
+                <a:spcPct val="0"/>
+              </a:spcAft>
+              <a:defRPr>
+                <a:solidFill>
+                  <a:schemeClr val="tx1"/>
+                </a:solidFill>
+                <a:latin typeface="Calibri" panose="020F0502020204030204" pitchFamily="34" charset="0"/>
+              </a:defRPr>
+            </a:lvl7pPr>
+            <a:lvl8pPr marL="3429000" indent="-228600" eaLnBrk="0" fontAlgn="base" hangingPunct="0">
+              <a:spcBef>
+                <a:spcPct val="0"/>
+              </a:spcBef>
+              <a:spcAft>
+                <a:spcPct val="0"/>
+              </a:spcAft>
+              <a:defRPr>
+                <a:solidFill>
+                  <a:schemeClr val="tx1"/>
+                </a:solidFill>
+                <a:latin typeface="Calibri" panose="020F0502020204030204" pitchFamily="34" charset="0"/>
+              </a:defRPr>
+            </a:lvl8pPr>
+            <a:lvl9pPr marL="3886200" indent="-228600" eaLnBrk="0" fontAlgn="base" hangingPunct="0">
+              <a:spcBef>
+                <a:spcPct val="0"/>
+              </a:spcBef>
+              <a:spcAft>
+                <a:spcPct val="0"/>
+              </a:spcAft>
+              <a:defRPr>
+                <a:solidFill>
+                  <a:schemeClr val="tx1"/>
+                </a:solidFill>
+                <a:latin typeface="Calibri" panose="020F0502020204030204" pitchFamily="34" charset="0"/>
+              </a:defRPr>
+            </a:lvl9pPr>
+          </a:lstStyle>
+          <a:p>
+            <a:pPr algn="ctr" eaLnBrk="1" hangingPunct="1"/>
+            <a:r>
+              <a:rPr lang="en-US" altLang="en-US" sz="1100" dirty="0">
+                <a:latin typeface="Arial" panose="020B0604020202020204" pitchFamily="34" charset="0"/>
+                <a:ea typeface="Amazon Ember" panose="020B0603020204020204" pitchFamily="34" charset="0"/>
+                <a:cs typeface="Arial" panose="020B0604020202020204" pitchFamily="34" charset="0"/>
+              </a:rPr>
+              <a:t>Amazon ECS</a:t>
+            </a:r>
+          </a:p>
+        </p:txBody>
+      </p:sp>
+      <p:sp>
+        <p:nvSpPr>
+          <p:cNvPr id="26" name="TextBox 21">
+            <a:extLst>
+              <a:ext uri="{FF2B5EF4-FFF2-40B4-BE49-F238E27FC236}">
+                <a16:creationId xmlns:a16="http://schemas.microsoft.com/office/drawing/2014/main" id="{29D60720-6F7C-B05A-983F-FA395F3E667F}"/>
+              </a:ext>
+            </a:extLst>
+          </p:cNvPr>
+          <p:cNvSpPr txBox="1">
+            <a:spLocks noChangeArrowheads="1"/>
+          </p:cNvSpPr>
+          <p:nvPr/>
+        </p:nvSpPr>
+        <p:spPr bwMode="auto">
+          <a:xfrm>
+            <a:off x="4942339" y="5800715"/>
+            <a:ext cx="1382713" cy="261610"/>
+          </a:xfrm>
+          <a:prstGeom prst="rect">
+            <a:avLst/>
+          </a:prstGeom>
+          <a:noFill/>
+          <a:ln>
+            <a:noFill/>
+          </a:ln>
+          <a:extLst>
+            <a:ext uri="{909E8E84-426E-40DD-AFC4-6F175D3DCCD1}">
+              <a14:hiddenFill xmlns:a14="http://schemas.microsoft.com/office/drawing/2010/main">
+                <a:solidFill>
+                  <a:srgbClr val="FFFFFF"/>
+                </a:solidFill>
+              </a14:hiddenFill>
+            </a:ext>
+            <a:ext uri="{91240B29-F687-4F45-9708-019B960494DF}">
+              <a14:hiddenLine xmlns:a14="http://schemas.microsoft.com/office/drawing/2010/main" w="9525">
+                <a:solidFill>
+                  <a:srgbClr val="000000"/>
+                </a:solidFill>
+                <a:miter lim="800000"/>
+                <a:headEnd/>
+                <a:tailEnd/>
+              </a14:hiddenLine>
+            </a:ext>
+          </a:extLst>
+        </p:spPr>
+        <p:txBody>
+          <a:bodyPr>
+            <a:spAutoFit/>
+          </a:bodyPr>
+          <a:lstStyle>
+            <a:lvl1pPr>
+              <a:defRPr>
+                <a:solidFill>
+                  <a:schemeClr val="tx1"/>
+                </a:solidFill>
+                <a:latin typeface="Calibri" panose="020F0502020204030204" pitchFamily="34" charset="0"/>
+              </a:defRPr>
+            </a:lvl1pPr>
+            <a:lvl2pPr marL="742950" indent="-285750">
+              <a:defRPr>
+                <a:solidFill>
+                  <a:schemeClr val="tx1"/>
+                </a:solidFill>
+                <a:latin typeface="Calibri" panose="020F0502020204030204" pitchFamily="34" charset="0"/>
+              </a:defRPr>
+            </a:lvl2pPr>
+            <a:lvl3pPr marL="1143000" indent="-228600">
+              <a:defRPr>
+                <a:solidFill>
+                  <a:schemeClr val="tx1"/>
+                </a:solidFill>
+                <a:latin typeface="Calibri" panose="020F0502020204030204" pitchFamily="34" charset="0"/>
+              </a:defRPr>
+            </a:lvl3pPr>
+            <a:lvl4pPr marL="1600200" indent="-228600">
+              <a:defRPr>
+                <a:solidFill>
+                  <a:schemeClr val="tx1"/>
+                </a:solidFill>
+                <a:latin typeface="Calibri" panose="020F0502020204030204" pitchFamily="34" charset="0"/>
+              </a:defRPr>
+            </a:lvl4pPr>
+            <a:lvl5pPr marL="2057400" indent="-228600">
+              <a:defRPr>
+                <a:solidFill>
+                  <a:schemeClr val="tx1"/>
+                </a:solidFill>
+                <a:latin typeface="Calibri" panose="020F0502020204030204" pitchFamily="34" charset="0"/>
+              </a:defRPr>
+            </a:lvl5pPr>
+            <a:lvl6pPr marL="2514600" indent="-228600" eaLnBrk="0" fontAlgn="base" hangingPunct="0">
+              <a:spcBef>
+                <a:spcPct val="0"/>
+              </a:spcBef>
+              <a:spcAft>
+                <a:spcPct val="0"/>
+              </a:spcAft>
+              <a:defRPr>
+                <a:solidFill>
+                  <a:schemeClr val="tx1"/>
+                </a:solidFill>
+                <a:latin typeface="Calibri" panose="020F0502020204030204" pitchFamily="34" charset="0"/>
+              </a:defRPr>
+            </a:lvl6pPr>
+            <a:lvl7pPr marL="2971800" indent="-228600" eaLnBrk="0" fontAlgn="base" hangingPunct="0">
+              <a:spcBef>
+                <a:spcPct val="0"/>
+              </a:spcBef>
+              <a:spcAft>
+                <a:spcPct val="0"/>
+              </a:spcAft>
+              <a:defRPr>
+                <a:solidFill>
+                  <a:schemeClr val="tx1"/>
+                </a:solidFill>
+                <a:latin typeface="Calibri" panose="020F0502020204030204" pitchFamily="34" charset="0"/>
+              </a:defRPr>
+            </a:lvl7pPr>
+            <a:lvl8pPr marL="3429000" indent="-228600" eaLnBrk="0" fontAlgn="base" hangingPunct="0">
+              <a:spcBef>
+                <a:spcPct val="0"/>
+              </a:spcBef>
+              <a:spcAft>
+                <a:spcPct val="0"/>
+              </a:spcAft>
+              <a:defRPr>
+                <a:solidFill>
+                  <a:schemeClr val="tx1"/>
+                </a:solidFill>
+                <a:latin typeface="Calibri" panose="020F0502020204030204" pitchFamily="34" charset="0"/>
+              </a:defRPr>
+            </a:lvl8pPr>
+            <a:lvl9pPr marL="3886200" indent="-228600" eaLnBrk="0" fontAlgn="base" hangingPunct="0">
+              <a:spcBef>
+                <a:spcPct val="0"/>
+              </a:spcBef>
+              <a:spcAft>
+                <a:spcPct val="0"/>
+              </a:spcAft>
+              <a:defRPr>
+                <a:solidFill>
+                  <a:schemeClr val="tx1"/>
+                </a:solidFill>
+                <a:latin typeface="Calibri" panose="020F0502020204030204" pitchFamily="34" charset="0"/>
+              </a:defRPr>
+            </a:lvl9pPr>
+          </a:lstStyle>
+          <a:p>
+            <a:pPr algn="ctr" eaLnBrk="1" hangingPunct="1"/>
+            <a:r>
+              <a:rPr lang="en-US" altLang="en-US" sz="1100" dirty="0">
+                <a:latin typeface="Arial" panose="020B0604020202020204" pitchFamily="34" charset="0"/>
+                <a:ea typeface="Amazon Ember" panose="020B0603020204020204" pitchFamily="34" charset="0"/>
+                <a:cs typeface="Arial" panose="020B0604020202020204" pitchFamily="34" charset="0"/>
+              </a:rPr>
+              <a:t>S3 Bucket</a:t>
+            </a:r>
+          </a:p>
+        </p:txBody>
+      </p:sp>
+      <p:pic>
+        <p:nvPicPr>
+          <p:cNvPr id="27" name="Graphic 14">
+            <a:extLst>
+              <a:ext uri="{FF2B5EF4-FFF2-40B4-BE49-F238E27FC236}">
+                <a16:creationId xmlns:a16="http://schemas.microsoft.com/office/drawing/2014/main" id="{9C0CA85C-00D2-E10A-006A-A4169627AEF7}"/>
+              </a:ext>
+            </a:extLst>
+          </p:cNvPr>
+          <p:cNvPicPr>
+            <a:picLocks noChangeAspect="1" noChangeArrowheads="1"/>
+          </p:cNvPicPr>
+          <p:nvPr/>
+        </p:nvPicPr>
+        <p:blipFill>
+          <a:blip r:embed="rId10">
+            <a:extLst>
+              <a:ext uri="{28A0092B-C50C-407E-A947-70E740481C1C}">
+                <a14:useLocalDpi xmlns:a14="http://schemas.microsoft.com/office/drawing/2010/main" val="0"/>
+              </a:ext>
+            </a:extLst>
+          </a:blip>
+          <a:srcRect/>
+          <a:stretch>
+            <a:fillRect/>
+          </a:stretch>
+        </p:blipFill>
+        <p:spPr bwMode="auto">
+          <a:xfrm>
+            <a:off x="5410652" y="5347486"/>
+            <a:ext cx="457200" cy="457200"/>
+          </a:xfrm>
+          <a:prstGeom prst="rect">
+            <a:avLst/>
+          </a:prstGeom>
+          <a:noFill/>
+          <a:ln>
+            <a:noFill/>
+          </a:ln>
+          <a:extLst>
+            <a:ext uri="{909E8E84-426E-40DD-AFC4-6F175D3DCCD1}">
+              <a14:hiddenFill xmlns:a14="http://schemas.microsoft.com/office/drawing/2010/main">
+                <a:solidFill>
+                  <a:srgbClr val="FFFFFF"/>
+                </a:solidFill>
+              </a14:hiddenFill>
+            </a:ext>
+            <a:ext uri="{91240B29-F687-4F45-9708-019B960494DF}">
+              <a14:hiddenLine xmlns:a14="http://schemas.microsoft.com/office/drawing/2010/main" w="9525">
+                <a:solidFill>
+                  <a:srgbClr val="000000"/>
+                </a:solidFill>
+                <a:miter lim="800000"/>
+                <a:headEnd/>
+                <a:tailEnd/>
+              </a14:hiddenLine>
+            </a:ext>
+          </a:extLst>
+        </p:spPr>
+      </p:pic>
+      <p:sp>
+        <p:nvSpPr>
+          <p:cNvPr id="35" name="Freeform 34">
+            <a:extLst>
+              <a:ext uri="{FF2B5EF4-FFF2-40B4-BE49-F238E27FC236}">
+                <a16:creationId xmlns:a16="http://schemas.microsoft.com/office/drawing/2014/main" id="{5297B63B-5CCB-4B2C-F0DD-7CB1CB1BBBCE}"/>
+              </a:ext>
+            </a:extLst>
+          </p:cNvPr>
+          <p:cNvSpPr/>
+          <p:nvPr/>
+        </p:nvSpPr>
+        <p:spPr>
+          <a:xfrm rot="16200000" flipH="1" flipV="1">
+            <a:off x="4056454" y="2727153"/>
+            <a:ext cx="719138" cy="711200"/>
+          </a:xfrm>
+          <a:custGeom>
+            <a:avLst/>
+            <a:gdLst>
+              <a:gd name="connsiteX0" fmla="*/ 1371600 w 1371600"/>
+              <a:gd name="connsiteY0" fmla="*/ 711200 h 711200"/>
+              <a:gd name="connsiteX1" fmla="*/ 1371600 w 1371600"/>
+              <a:gd name="connsiteY1" fmla="*/ 0 h 711200"/>
+              <a:gd name="connsiteX2" fmla="*/ 0 w 1371600"/>
+              <a:gd name="connsiteY2" fmla="*/ 0 h 711200"/>
+            </a:gdLst>
+            <a:ahLst/>
+            <a:cxnLst>
+              <a:cxn ang="0">
+                <a:pos x="connsiteX0" y="connsiteY0"/>
+              </a:cxn>
+              <a:cxn ang="0">
+                <a:pos x="connsiteX1" y="connsiteY1"/>
+              </a:cxn>
+              <a:cxn ang="0">
+                <a:pos x="connsiteX2" y="connsiteY2"/>
+              </a:cxn>
+            </a:cxnLst>
+            <a:rect l="l" t="t" r="r" b="b"/>
+            <a:pathLst>
+              <a:path w="1371600" h="711200">
+                <a:moveTo>
+                  <a:pt x="1371600" y="711200"/>
+                </a:moveTo>
+                <a:lnTo>
+                  <a:pt x="1371600" y="0"/>
+                </a:lnTo>
+                <a:lnTo>
+                  <a:pt x="0" y="0"/>
+                </a:lnTo>
+              </a:path>
+            </a:pathLst>
+          </a:custGeom>
+          <a:noFill/>
+          <a:ln w="12700">
+            <a:solidFill>
+              <a:schemeClr val="tx2"/>
+            </a:solidFill>
+            <a:headEnd type="none" w="med" len="sm"/>
+            <a:tailEnd type="arrow" w="med" len="sm"/>
+          </a:ln>
+        </p:spPr>
+        <p:style>
+          <a:lnRef idx="2">
+            <a:schemeClr val="accent1">
+              <a:shade val="50000"/>
+            </a:schemeClr>
+          </a:lnRef>
+          <a:fillRef idx="1">
+            <a:schemeClr val="accent1"/>
+          </a:fillRef>
+          <a:effectRef idx="0">
+            <a:schemeClr val="accent1"/>
+          </a:effectRef>
+          <a:fontRef idx="minor">
+            <a:schemeClr val="lt1"/>
+          </a:fontRef>
+        </p:style>
+        <p:txBody>
+          <a:bodyPr anchor="ctr"/>
+          <a:lstStyle/>
+          <a:p>
+            <a:pPr algn="ctr" eaLnBrk="1" fontAlgn="auto" hangingPunct="1">
+              <a:spcBef>
+                <a:spcPts val="0"/>
+              </a:spcBef>
+              <a:spcAft>
+                <a:spcPts val="0"/>
+              </a:spcAft>
+              <a:defRPr/>
+            </a:pPr>
+            <a:endParaRPr lang="en-US" dirty="0"/>
+          </a:p>
+        </p:txBody>
+      </p:sp>
+      <p:cxnSp>
+        <p:nvCxnSpPr>
+          <p:cNvPr id="38" name="Straight Arrow Connector 37">
+            <a:extLst>
+              <a:ext uri="{FF2B5EF4-FFF2-40B4-BE49-F238E27FC236}">
+                <a16:creationId xmlns:a16="http://schemas.microsoft.com/office/drawing/2014/main" id="{A54E5C87-C14F-0346-0DC9-5BE8036A3CFF}"/>
+              </a:ext>
+            </a:extLst>
+          </p:cNvPr>
+          <p:cNvCxnSpPr>
+            <a:cxnSpLocks/>
+          </p:cNvCxnSpPr>
+          <p:nvPr/>
+        </p:nvCxnSpPr>
+        <p:spPr>
+          <a:xfrm>
+            <a:off x="5154944" y="2172949"/>
+            <a:ext cx="562541" cy="0"/>
+          </a:xfrm>
+          <a:prstGeom prst="straightConnector1">
+            <a:avLst/>
+          </a:prstGeom>
+          <a:ln w="12700">
+            <a:solidFill>
+              <a:srgbClr val="545B64"/>
+            </a:solidFill>
+            <a:headEnd type="none" w="med" len="sm"/>
+            <a:tailEnd type="arrow" w="med" len="sm"/>
+          </a:ln>
+        </p:spPr>
+        <p:style>
+          <a:lnRef idx="1">
+            <a:schemeClr val="accent1"/>
+          </a:lnRef>
+          <a:fillRef idx="0">
+            <a:schemeClr val="accent1"/>
+          </a:fillRef>
+          <a:effectRef idx="0">
+            <a:schemeClr val="accent1"/>
+          </a:effectRef>
+          <a:fontRef idx="minor">
+            <a:schemeClr val="tx1"/>
+          </a:fontRef>
+        </p:style>
+      </p:cxnSp>
+      <p:cxnSp>
+        <p:nvCxnSpPr>
+          <p:cNvPr id="43" name="Straight Arrow Connector 42">
+            <a:extLst>
+              <a:ext uri="{FF2B5EF4-FFF2-40B4-BE49-F238E27FC236}">
+                <a16:creationId xmlns:a16="http://schemas.microsoft.com/office/drawing/2014/main" id="{C42D6561-18D4-1F82-9FB9-88AC4C22BFB2}"/>
+              </a:ext>
+            </a:extLst>
+          </p:cNvPr>
+          <p:cNvCxnSpPr>
+            <a:cxnSpLocks/>
+          </p:cNvCxnSpPr>
+          <p:nvPr/>
+        </p:nvCxnSpPr>
+        <p:spPr>
+          <a:xfrm flipV="1">
+            <a:off x="3704065" y="4014439"/>
+            <a:ext cx="0" cy="1247233"/>
+          </a:xfrm>
+          <a:prstGeom prst="straightConnector1">
+            <a:avLst/>
+          </a:prstGeom>
+          <a:ln w="12700">
+            <a:solidFill>
+              <a:schemeClr val="tx2"/>
+            </a:solidFill>
+            <a:headEnd type="arrow" w="med" len="sm"/>
+            <a:tailEnd type="none" w="med" len="sm"/>
+          </a:ln>
+        </p:spPr>
+        <p:style>
+          <a:lnRef idx="1">
+            <a:schemeClr val="accent1"/>
+          </a:lnRef>
+          <a:fillRef idx="0">
+            <a:schemeClr val="accent1"/>
+          </a:fillRef>
+          <a:effectRef idx="0">
+            <a:schemeClr val="accent1"/>
+          </a:effectRef>
+          <a:fontRef idx="minor">
+            <a:schemeClr val="tx1"/>
+          </a:fontRef>
+        </p:style>
+      </p:cxnSp>
+      <p:cxnSp>
+        <p:nvCxnSpPr>
+          <p:cNvPr id="45" name="Straight Arrow Connector 44">
+            <a:extLst>
+              <a:ext uri="{FF2B5EF4-FFF2-40B4-BE49-F238E27FC236}">
+                <a16:creationId xmlns:a16="http://schemas.microsoft.com/office/drawing/2014/main" id="{38BBF6AC-ADE7-4ADF-55E7-922952386CC8}"/>
+              </a:ext>
+            </a:extLst>
+          </p:cNvPr>
+          <p:cNvCxnSpPr>
+            <a:cxnSpLocks/>
+          </p:cNvCxnSpPr>
+          <p:nvPr/>
+        </p:nvCxnSpPr>
+        <p:spPr>
+          <a:xfrm>
+            <a:off x="6423106" y="2172949"/>
+            <a:ext cx="524113" cy="0"/>
+          </a:xfrm>
+          <a:prstGeom prst="straightConnector1">
+            <a:avLst/>
+          </a:prstGeom>
+          <a:ln w="12700">
+            <a:solidFill>
+              <a:srgbClr val="545B64"/>
+            </a:solidFill>
+            <a:headEnd type="none" w="med" len="sm"/>
+            <a:tailEnd type="arrow" w="med" len="sm"/>
+          </a:ln>
+        </p:spPr>
+        <p:style>
+          <a:lnRef idx="1">
+            <a:schemeClr val="accent1"/>
+          </a:lnRef>
+          <a:fillRef idx="0">
+            <a:schemeClr val="accent1"/>
+          </a:fillRef>
+          <a:effectRef idx="0">
+            <a:schemeClr val="accent1"/>
+          </a:effectRef>
+          <a:fontRef idx="minor">
+            <a:schemeClr val="tx1"/>
+          </a:fontRef>
+        </p:style>
+      </p:cxnSp>
+      <p:cxnSp>
+        <p:nvCxnSpPr>
+          <p:cNvPr id="48" name="Straight Arrow Connector 47">
+            <a:extLst>
+              <a:ext uri="{FF2B5EF4-FFF2-40B4-BE49-F238E27FC236}">
+                <a16:creationId xmlns:a16="http://schemas.microsoft.com/office/drawing/2014/main" id="{51B6851D-85C6-4372-70E1-C18DE3B6FD9B}"/>
+              </a:ext>
+            </a:extLst>
+          </p:cNvPr>
+          <p:cNvCxnSpPr>
+            <a:cxnSpLocks/>
+          </p:cNvCxnSpPr>
+          <p:nvPr/>
+        </p:nvCxnSpPr>
+        <p:spPr>
+          <a:xfrm>
+            <a:off x="7690003" y="2172949"/>
+            <a:ext cx="615903" cy="0"/>
+          </a:xfrm>
+          <a:prstGeom prst="straightConnector1">
+            <a:avLst/>
+          </a:prstGeom>
+          <a:ln w="12700">
+            <a:solidFill>
+              <a:srgbClr val="545B64"/>
+            </a:solidFill>
+            <a:headEnd type="none" w="med" len="sm"/>
+            <a:tailEnd type="arrow" w="med" len="sm"/>
+          </a:ln>
+        </p:spPr>
+        <p:style>
+          <a:lnRef idx="1">
+            <a:schemeClr val="accent1"/>
+          </a:lnRef>
+          <a:fillRef idx="0">
+            <a:schemeClr val="accent1"/>
+          </a:fillRef>
+          <a:effectRef idx="0">
+            <a:schemeClr val="accent1"/>
+          </a:effectRef>
+          <a:fontRef idx="minor">
+            <a:schemeClr val="tx1"/>
+          </a:fontRef>
+        </p:style>
+      </p:cxnSp>
+      <p:cxnSp>
+        <p:nvCxnSpPr>
+          <p:cNvPr id="50" name="Straight Arrow Connector 49">
+            <a:extLst>
+              <a:ext uri="{FF2B5EF4-FFF2-40B4-BE49-F238E27FC236}">
+                <a16:creationId xmlns:a16="http://schemas.microsoft.com/office/drawing/2014/main" id="{5CF7928E-6155-9E0C-0B27-5B89FCDAF082}"/>
+              </a:ext>
+            </a:extLst>
+          </p:cNvPr>
+          <p:cNvCxnSpPr>
+            <a:cxnSpLocks/>
+          </p:cNvCxnSpPr>
+          <p:nvPr/>
+        </p:nvCxnSpPr>
+        <p:spPr>
+          <a:xfrm>
+            <a:off x="4060113" y="5587151"/>
+            <a:ext cx="1231805" cy="0"/>
+          </a:xfrm>
+          <a:prstGeom prst="straightConnector1">
+            <a:avLst/>
+          </a:prstGeom>
+          <a:ln w="12700">
+            <a:solidFill>
+              <a:srgbClr val="545B64"/>
+            </a:solidFill>
+            <a:headEnd type="none" w="med" len="sm"/>
+            <a:tailEnd type="arrow" w="med" len="sm"/>
+          </a:ln>
+        </p:spPr>
+        <p:style>
+          <a:lnRef idx="1">
+            <a:schemeClr val="accent1"/>
+          </a:lnRef>
+          <a:fillRef idx="0">
+            <a:schemeClr val="accent1"/>
+          </a:fillRef>
+          <a:effectRef idx="0">
+            <a:schemeClr val="accent1"/>
+          </a:effectRef>
+          <a:fontRef idx="minor">
+            <a:schemeClr val="tx1"/>
+          </a:fontRef>
+        </p:style>
+      </p:cxnSp>
+      <p:sp>
+        <p:nvSpPr>
+          <p:cNvPr id="52" name="Rectangle 51">
+            <a:extLst>
+              <a:ext uri="{FF2B5EF4-FFF2-40B4-BE49-F238E27FC236}">
+                <a16:creationId xmlns:a16="http://schemas.microsoft.com/office/drawing/2014/main" id="{5A366279-7062-773D-DEC8-F61CCDF3FAF1}"/>
+              </a:ext>
+            </a:extLst>
+          </p:cNvPr>
+          <p:cNvSpPr/>
+          <p:nvPr/>
+        </p:nvSpPr>
+        <p:spPr bwMode="auto">
+          <a:xfrm>
+            <a:off x="1926990" y="4159407"/>
+            <a:ext cx="2596414" cy="2102608"/>
+          </a:xfrm>
+          <a:prstGeom prst="rect">
+            <a:avLst/>
+          </a:prstGeom>
+          <a:noFill/>
+          <a:ln w="12700">
+            <a:solidFill>
+              <a:srgbClr val="1E8900"/>
+            </a:solidFill>
+          </a:ln>
+        </p:spPr>
+        <p:style>
+          <a:lnRef idx="2">
+            <a:schemeClr val="accent1">
+              <a:shade val="50000"/>
+            </a:schemeClr>
+          </a:lnRef>
+          <a:fillRef idx="1">
+            <a:schemeClr val="accent1"/>
+          </a:fillRef>
+          <a:effectRef idx="0">
+            <a:schemeClr val="accent1"/>
+          </a:effectRef>
+          <a:fontRef idx="minor">
+            <a:schemeClr val="lt1"/>
+          </a:fontRef>
+        </p:style>
+        <p:txBody>
+          <a:bodyPr lIns="502920" tIns="91440"/>
+          <a:lstStyle/>
+          <a:p>
+            <a:pPr eaLnBrk="1" fontAlgn="auto" hangingPunct="1">
+              <a:spcBef>
+                <a:spcPts val="0"/>
+              </a:spcBef>
+              <a:spcAft>
+                <a:spcPts val="0"/>
+              </a:spcAft>
+              <a:defRPr/>
+            </a:pPr>
+            <a:r>
+              <a:rPr lang="en-US" sz="1200" dirty="0">
+                <a:ln w="0"/>
+                <a:solidFill>
+                  <a:srgbClr val="1E8900"/>
+                </a:solidFill>
+                <a:latin typeface="Arial" panose="020B0604020202020204" pitchFamily="34" charset="0"/>
+                <a:cs typeface="Arial" panose="020B0604020202020204" pitchFamily="34" charset="0"/>
+              </a:rPr>
+              <a:t>VPC</a:t>
+            </a:r>
+          </a:p>
+        </p:txBody>
+      </p:sp>
+      <p:pic>
+        <p:nvPicPr>
+          <p:cNvPr id="53" name="Graphic 52">
+            <a:extLst>
+              <a:ext uri="{FF2B5EF4-FFF2-40B4-BE49-F238E27FC236}">
+                <a16:creationId xmlns:a16="http://schemas.microsoft.com/office/drawing/2014/main" id="{FC571BE6-4BBC-766D-9FC9-32A9C81538F7}"/>
+              </a:ext>
+            </a:extLst>
+          </p:cNvPr>
+          <p:cNvPicPr>
+            <a:picLocks noChangeAspect="1"/>
+          </p:cNvPicPr>
+          <p:nvPr/>
+        </p:nvPicPr>
+        <p:blipFill>
+          <a:blip r:embed="rId11">
+            <a:extLst>
+              <a:ext uri="{96DAC541-7B7A-43D3-8B79-37D633B846F1}">
+                <asvg:svgBlip xmlns:asvg="http://schemas.microsoft.com/office/drawing/2016/SVG/main" r:embed="rId12"/>
+              </a:ext>
+            </a:extLst>
+          </a:blip>
+          <a:stretch>
+            <a:fillRect/>
+          </a:stretch>
+        </p:blipFill>
+        <p:spPr>
+          <a:xfrm>
+            <a:off x="1926985" y="4157990"/>
+            <a:ext cx="381000" cy="381000"/>
+          </a:xfrm>
+          <a:prstGeom prst="rect">
+            <a:avLst/>
+          </a:prstGeom>
+        </p:spPr>
+      </p:pic>
+      <p:pic>
+        <p:nvPicPr>
+          <p:cNvPr id="56" name="Graphic 55">
+            <a:extLst>
+              <a:ext uri="{FF2B5EF4-FFF2-40B4-BE49-F238E27FC236}">
+                <a16:creationId xmlns:a16="http://schemas.microsoft.com/office/drawing/2014/main" id="{6CDC4947-3D56-36A9-8148-BDA1B83AF3A6}"/>
+              </a:ext>
+            </a:extLst>
+          </p:cNvPr>
+          <p:cNvPicPr>
+            <a:picLocks noChangeAspect="1"/>
+          </p:cNvPicPr>
+          <p:nvPr/>
+        </p:nvPicPr>
+        <p:blipFill>
+          <a:blip r:embed="rId13">
+            <a:extLst>
+              <a:ext uri="{96DAC541-7B7A-43D3-8B79-37D633B846F1}">
+                <asvg:svgBlip xmlns:asvg="http://schemas.microsoft.com/office/drawing/2016/SVG/main" r:embed="rId14"/>
+              </a:ext>
+            </a:extLst>
+          </a:blip>
+          <a:stretch>
+            <a:fillRect/>
+          </a:stretch>
+        </p:blipFill>
+        <p:spPr>
+          <a:xfrm>
+            <a:off x="1926985" y="4737344"/>
+            <a:ext cx="381000" cy="381000"/>
+          </a:xfrm>
+          <a:prstGeom prst="rect">
+            <a:avLst/>
+          </a:prstGeom>
+        </p:spPr>
+      </p:pic>
+      <p:sp>
+        <p:nvSpPr>
+          <p:cNvPr id="57" name="TextBox 12">
+            <a:extLst>
+              <a:ext uri="{FF2B5EF4-FFF2-40B4-BE49-F238E27FC236}">
+                <a16:creationId xmlns:a16="http://schemas.microsoft.com/office/drawing/2014/main" id="{741B3048-A8B6-8871-0086-ACF8B737AAB0}"/>
+              </a:ext>
+            </a:extLst>
+          </p:cNvPr>
+          <p:cNvSpPr txBox="1">
+            <a:spLocks noChangeArrowheads="1"/>
+          </p:cNvSpPr>
+          <p:nvPr/>
+        </p:nvSpPr>
+        <p:spPr bwMode="auto">
+          <a:xfrm>
+            <a:off x="1237303" y="5800715"/>
+            <a:ext cx="1403350" cy="261610"/>
+          </a:xfrm>
+          <a:prstGeom prst="rect">
+            <a:avLst/>
+          </a:prstGeom>
+          <a:noFill/>
+          <a:ln>
+            <a:noFill/>
+          </a:ln>
+          <a:extLst>
+            <a:ext uri="{909E8E84-426E-40DD-AFC4-6F175D3DCCD1}">
+              <a14:hiddenFill xmlns:a14="http://schemas.microsoft.com/office/drawing/2010/main">
+                <a:solidFill>
+                  <a:srgbClr val="FFFFFF"/>
+                </a:solidFill>
+              </a14:hiddenFill>
+            </a:ext>
+            <a:ext uri="{91240B29-F687-4F45-9708-019B960494DF}">
+              <a14:hiddenLine xmlns:a14="http://schemas.microsoft.com/office/drawing/2010/main" w="9525">
+                <a:solidFill>
+                  <a:srgbClr val="000000"/>
+                </a:solidFill>
+                <a:miter lim="800000"/>
+                <a:headEnd/>
+                <a:tailEnd/>
+              </a14:hiddenLine>
+            </a:ext>
+          </a:extLst>
+        </p:spPr>
+        <p:txBody>
+          <a:bodyPr>
+            <a:spAutoFit/>
+          </a:bodyPr>
+          <a:lstStyle>
+            <a:lvl1pPr>
+              <a:defRPr>
+                <a:solidFill>
+                  <a:schemeClr val="tx1"/>
+                </a:solidFill>
+                <a:latin typeface="Calibri" panose="020F0502020204030204" pitchFamily="34" charset="0"/>
+              </a:defRPr>
+            </a:lvl1pPr>
+            <a:lvl2pPr marL="742950" indent="-285750">
+              <a:defRPr>
+                <a:solidFill>
+                  <a:schemeClr val="tx1"/>
+                </a:solidFill>
+                <a:latin typeface="Calibri" panose="020F0502020204030204" pitchFamily="34" charset="0"/>
+              </a:defRPr>
+            </a:lvl2pPr>
+            <a:lvl3pPr marL="1143000" indent="-228600">
+              <a:defRPr>
+                <a:solidFill>
+                  <a:schemeClr val="tx1"/>
+                </a:solidFill>
+                <a:latin typeface="Calibri" panose="020F0502020204030204" pitchFamily="34" charset="0"/>
+              </a:defRPr>
+            </a:lvl3pPr>
+            <a:lvl4pPr marL="1600200" indent="-228600">
+              <a:defRPr>
+                <a:solidFill>
+                  <a:schemeClr val="tx1"/>
+                </a:solidFill>
+                <a:latin typeface="Calibri" panose="020F0502020204030204" pitchFamily="34" charset="0"/>
+              </a:defRPr>
+            </a:lvl4pPr>
+            <a:lvl5pPr marL="2057400" indent="-228600">
+              <a:defRPr>
+                <a:solidFill>
+                  <a:schemeClr val="tx1"/>
+                </a:solidFill>
+                <a:latin typeface="Calibri" panose="020F0502020204030204" pitchFamily="34" charset="0"/>
+              </a:defRPr>
+            </a:lvl5pPr>
+            <a:lvl6pPr marL="2514600" indent="-228600" eaLnBrk="0" fontAlgn="base" hangingPunct="0">
+              <a:spcBef>
+                <a:spcPct val="0"/>
+              </a:spcBef>
+              <a:spcAft>
+                <a:spcPct val="0"/>
+              </a:spcAft>
+              <a:defRPr>
+                <a:solidFill>
+                  <a:schemeClr val="tx1"/>
+                </a:solidFill>
+                <a:latin typeface="Calibri" panose="020F0502020204030204" pitchFamily="34" charset="0"/>
+              </a:defRPr>
+            </a:lvl6pPr>
+            <a:lvl7pPr marL="2971800" indent="-228600" eaLnBrk="0" fontAlgn="base" hangingPunct="0">
+              <a:spcBef>
+                <a:spcPct val="0"/>
+              </a:spcBef>
+              <a:spcAft>
+                <a:spcPct val="0"/>
+              </a:spcAft>
+              <a:defRPr>
+                <a:solidFill>
+                  <a:schemeClr val="tx1"/>
+                </a:solidFill>
+                <a:latin typeface="Calibri" panose="020F0502020204030204" pitchFamily="34" charset="0"/>
+              </a:defRPr>
+            </a:lvl7pPr>
+            <a:lvl8pPr marL="3429000" indent="-228600" eaLnBrk="0" fontAlgn="base" hangingPunct="0">
+              <a:spcBef>
+                <a:spcPct val="0"/>
+              </a:spcBef>
+              <a:spcAft>
+                <a:spcPct val="0"/>
+              </a:spcAft>
+              <a:defRPr>
+                <a:solidFill>
+                  <a:schemeClr val="tx1"/>
+                </a:solidFill>
+                <a:latin typeface="Calibri" panose="020F0502020204030204" pitchFamily="34" charset="0"/>
+              </a:defRPr>
+            </a:lvl8pPr>
+            <a:lvl9pPr marL="3886200" indent="-228600" eaLnBrk="0" fontAlgn="base" hangingPunct="0">
+              <a:spcBef>
+                <a:spcPct val="0"/>
+              </a:spcBef>
+              <a:spcAft>
+                <a:spcPct val="0"/>
+              </a:spcAft>
+              <a:defRPr>
+                <a:solidFill>
+                  <a:schemeClr val="tx1"/>
+                </a:solidFill>
+                <a:latin typeface="Calibri" panose="020F0502020204030204" pitchFamily="34" charset="0"/>
+              </a:defRPr>
+            </a:lvl9pPr>
+          </a:lstStyle>
+          <a:p>
+            <a:pPr algn="ctr" eaLnBrk="1" hangingPunct="1"/>
+            <a:r>
+              <a:rPr lang="en-US" altLang="en-US" sz="1100" dirty="0">
+                <a:latin typeface="Arial" panose="020B0604020202020204" pitchFamily="34" charset="0"/>
+                <a:ea typeface="Amazon Ember" panose="020B0603020204020204" pitchFamily="34" charset="0"/>
+                <a:cs typeface="Arial" panose="020B0604020202020204" pitchFamily="34" charset="0"/>
+              </a:rPr>
+              <a:t>Internet gateway</a:t>
+            </a:r>
+          </a:p>
+        </p:txBody>
+      </p:sp>
+      <p:cxnSp>
+        <p:nvCxnSpPr>
+          <p:cNvPr id="84" name="Straight Arrow Connector 83">
+            <a:extLst>
+              <a:ext uri="{FF2B5EF4-FFF2-40B4-BE49-F238E27FC236}">
+                <a16:creationId xmlns:a16="http://schemas.microsoft.com/office/drawing/2014/main" id="{1841A60A-0BC1-5233-9A01-18A42EFD9DD1}"/>
+              </a:ext>
+            </a:extLst>
+          </p:cNvPr>
+          <p:cNvCxnSpPr>
+            <a:cxnSpLocks/>
+          </p:cNvCxnSpPr>
+          <p:nvPr/>
+        </p:nvCxnSpPr>
+        <p:spPr>
+          <a:xfrm flipH="1">
+            <a:off x="984178" y="5583435"/>
+            <a:ext cx="2380843" cy="0"/>
+          </a:xfrm>
+          <a:prstGeom prst="straightConnector1">
+            <a:avLst/>
+          </a:prstGeom>
+          <a:ln w="12700">
+            <a:solidFill>
+              <a:srgbClr val="545B64"/>
+            </a:solidFill>
+            <a:headEnd type="none" w="med" len="sm"/>
+            <a:tailEnd type="arrow" w="med" len="sm"/>
+          </a:ln>
+        </p:spPr>
+        <p:style>
+          <a:lnRef idx="1">
+            <a:schemeClr val="accent1"/>
+          </a:lnRef>
+          <a:fillRef idx="0">
+            <a:schemeClr val="accent1"/>
+          </a:fillRef>
+          <a:effectRef idx="0">
+            <a:schemeClr val="accent1"/>
+          </a:effectRef>
+          <a:fontRef idx="minor">
+            <a:schemeClr val="tx1"/>
+          </a:fontRef>
+        </p:style>
+      </p:cxnSp>
+      <p:sp>
+        <p:nvSpPr>
+          <p:cNvPr id="90" name="Oval 89">
+            <a:extLst>
+              <a:ext uri="{FF2B5EF4-FFF2-40B4-BE49-F238E27FC236}">
+                <a16:creationId xmlns:a16="http://schemas.microsoft.com/office/drawing/2014/main" id="{09F17E4D-A9AD-5126-8DAF-469544DBE6BB}"/>
+              </a:ext>
+            </a:extLst>
+          </p:cNvPr>
+          <p:cNvSpPr/>
+          <p:nvPr/>
+        </p:nvSpPr>
+        <p:spPr>
+          <a:xfrm>
+            <a:off x="1690647" y="5345501"/>
+            <a:ext cx="457200" cy="457200"/>
+          </a:xfrm>
+          <a:prstGeom prst="ellipse">
+            <a:avLst/>
+          </a:prstGeom>
+          <a:solidFill>
+            <a:schemeClr val="bg1"/>
+          </a:solidFill>
+          <a:ln>
+            <a:noFill/>
+          </a:ln>
+        </p:spPr>
+        <p:style>
+          <a:lnRef idx="2">
+            <a:schemeClr val="accent1">
+              <a:shade val="50000"/>
+            </a:schemeClr>
+          </a:lnRef>
+          <a:fillRef idx="1">
+            <a:schemeClr val="accent1"/>
+          </a:fillRef>
+          <a:effectRef idx="0">
+            <a:schemeClr val="accent1"/>
+          </a:effectRef>
+          <a:fontRef idx="minor">
+            <a:schemeClr val="lt1"/>
+          </a:fontRef>
+        </p:style>
+        <p:txBody>
+          <a:bodyPr rtlCol="0" anchor="ctr"/>
+          <a:lstStyle/>
+          <a:p>
+            <a:pPr algn="ctr"/>
+            <a:endParaRPr lang="en-US"/>
+          </a:p>
+        </p:txBody>
+      </p:sp>
+      <p:pic>
+        <p:nvPicPr>
+          <p:cNvPr id="58" name="Graphic 10">
+            <a:extLst>
+              <a:ext uri="{FF2B5EF4-FFF2-40B4-BE49-F238E27FC236}">
+                <a16:creationId xmlns:a16="http://schemas.microsoft.com/office/drawing/2014/main" id="{B9382BE7-E080-B7A6-1F65-D1E7DCC01934}"/>
+              </a:ext>
+            </a:extLst>
+          </p:cNvPr>
+          <p:cNvPicPr>
+            <a:picLocks noChangeAspect="1" noChangeArrowheads="1"/>
+          </p:cNvPicPr>
+          <p:nvPr/>
+        </p:nvPicPr>
+        <p:blipFill>
+          <a:blip r:embed="rId15">
+            <a:extLst>
+              <a:ext uri="{28A0092B-C50C-407E-A947-70E740481C1C}">
+                <a14:useLocalDpi xmlns:a14="http://schemas.microsoft.com/office/drawing/2010/main" val="0"/>
+              </a:ext>
+            </a:extLst>
+          </a:blip>
+          <a:srcRect/>
+          <a:stretch>
+            <a:fillRect/>
+          </a:stretch>
+        </p:blipFill>
+        <p:spPr bwMode="auto">
+          <a:xfrm>
+            <a:off x="1698508" y="5347486"/>
+            <a:ext cx="457200" cy="457200"/>
+          </a:xfrm>
+          <a:prstGeom prst="rect">
+            <a:avLst/>
+          </a:prstGeom>
+          <a:noFill/>
+          <a:ln>
+            <a:noFill/>
+          </a:ln>
+          <a:extLst>
+            <a:ext uri="{909E8E84-426E-40DD-AFC4-6F175D3DCCD1}">
+              <a14:hiddenFill xmlns:a14="http://schemas.microsoft.com/office/drawing/2010/main">
+                <a:solidFill>
+                  <a:srgbClr val="FFFFFF"/>
+                </a:solidFill>
+              </a14:hiddenFill>
+            </a:ext>
+            <a:ext uri="{91240B29-F687-4F45-9708-019B960494DF}">
+              <a14:hiddenLine xmlns:a14="http://schemas.microsoft.com/office/drawing/2010/main" w="9525">
+                <a:solidFill>
+                  <a:srgbClr val="000000"/>
+                </a:solidFill>
+                <a:miter lim="800000"/>
+                <a:headEnd/>
+                <a:tailEnd/>
+              </a14:hiddenLine>
+            </a:ext>
+          </a:extLst>
+        </p:spPr>
+      </p:pic>
+      <p:pic>
+        <p:nvPicPr>
+          <p:cNvPr id="59" name="Graphic 17">
+            <a:extLst>
+              <a:ext uri="{FF2B5EF4-FFF2-40B4-BE49-F238E27FC236}">
+                <a16:creationId xmlns:a16="http://schemas.microsoft.com/office/drawing/2014/main" id="{402DB16D-095A-A6DC-0CD3-2C4F43320871}"/>
+              </a:ext>
+            </a:extLst>
+          </p:cNvPr>
+          <p:cNvPicPr>
+            <a:picLocks noChangeAspect="1" noChangeArrowheads="1"/>
+          </p:cNvPicPr>
+          <p:nvPr/>
+        </p:nvPicPr>
+        <p:blipFill>
+          <a:blip r:embed="rId16">
+            <a:extLst>
+              <a:ext uri="{28A0092B-C50C-407E-A947-70E740481C1C}">
+                <a14:useLocalDpi xmlns:a14="http://schemas.microsoft.com/office/drawing/2010/main" val="0"/>
+              </a:ext>
+            </a:extLst>
+          </a:blip>
+          <a:srcRect/>
+          <a:stretch>
+            <a:fillRect/>
+          </a:stretch>
+        </p:blipFill>
+        <p:spPr bwMode="auto">
+          <a:xfrm>
+            <a:off x="1924891" y="3208140"/>
+            <a:ext cx="395048" cy="395048"/>
+          </a:xfrm>
+          <a:prstGeom prst="rect">
+            <a:avLst/>
+          </a:prstGeom>
+          <a:noFill/>
+          <a:ln>
+            <a:noFill/>
+          </a:ln>
+          <a:extLst>
+            <a:ext uri="{909E8E84-426E-40DD-AFC4-6F175D3DCCD1}">
+              <a14:hiddenFill xmlns:a14="http://schemas.microsoft.com/office/drawing/2010/main">
+                <a:solidFill>
+                  <a:srgbClr val="FFFFFF"/>
+                </a:solidFill>
+              </a14:hiddenFill>
+            </a:ext>
+            <a:ext uri="{91240B29-F687-4F45-9708-019B960494DF}">
+              <a14:hiddenLine xmlns:a14="http://schemas.microsoft.com/office/drawing/2010/main" w="9525">
+                <a:solidFill>
+                  <a:srgbClr val="000000"/>
+                </a:solidFill>
+                <a:miter lim="800000"/>
+                <a:headEnd/>
+                <a:tailEnd/>
+              </a14:hiddenLine>
+            </a:ext>
+          </a:extLst>
+        </p:spPr>
+      </p:pic>
+      <p:sp>
+        <p:nvSpPr>
+          <p:cNvPr id="60" name="TextBox 11">
+            <a:extLst>
+              <a:ext uri="{FF2B5EF4-FFF2-40B4-BE49-F238E27FC236}">
+                <a16:creationId xmlns:a16="http://schemas.microsoft.com/office/drawing/2014/main" id="{7D5F3AC4-65B6-EEC8-1ECC-22D4AAEBCF4B}"/>
+              </a:ext>
+            </a:extLst>
+          </p:cNvPr>
+          <p:cNvSpPr txBox="1">
+            <a:spLocks noChangeArrowheads="1"/>
+          </p:cNvSpPr>
+          <p:nvPr/>
+        </p:nvSpPr>
+        <p:spPr bwMode="auto">
+          <a:xfrm>
+            <a:off x="984178" y="3640743"/>
+            <a:ext cx="2292350" cy="261610"/>
+          </a:xfrm>
+          <a:prstGeom prst="rect">
+            <a:avLst/>
+          </a:prstGeom>
+          <a:noFill/>
+          <a:ln>
+            <a:noFill/>
+          </a:ln>
+          <a:extLst>
+            <a:ext uri="{909E8E84-426E-40DD-AFC4-6F175D3DCCD1}">
+              <a14:hiddenFill xmlns:a14="http://schemas.microsoft.com/office/drawing/2010/main">
+                <a:solidFill>
+                  <a:srgbClr val="FFFFFF"/>
+                </a:solidFill>
+              </a14:hiddenFill>
+            </a:ext>
+            <a:ext uri="{91240B29-F687-4F45-9708-019B960494DF}">
+              <a14:hiddenLine xmlns:a14="http://schemas.microsoft.com/office/drawing/2010/main" w="9525">
+                <a:solidFill>
+                  <a:srgbClr val="000000"/>
+                </a:solidFill>
+                <a:miter lim="800000"/>
+                <a:headEnd/>
+                <a:tailEnd/>
+              </a14:hiddenLine>
+            </a:ext>
+          </a:extLst>
+        </p:spPr>
+        <p:txBody>
+          <a:bodyPr>
+            <a:spAutoFit/>
+          </a:bodyPr>
+          <a:lstStyle>
+            <a:lvl1pPr>
+              <a:defRPr>
+                <a:solidFill>
+                  <a:schemeClr val="tx1"/>
+                </a:solidFill>
+                <a:latin typeface="Calibri" panose="020F0502020204030204" pitchFamily="34" charset="0"/>
+              </a:defRPr>
+            </a:lvl1pPr>
+            <a:lvl2pPr marL="742950" indent="-285750">
+              <a:defRPr>
+                <a:solidFill>
+                  <a:schemeClr val="tx1"/>
+                </a:solidFill>
+                <a:latin typeface="Calibri" panose="020F0502020204030204" pitchFamily="34" charset="0"/>
+              </a:defRPr>
+            </a:lvl2pPr>
+            <a:lvl3pPr marL="1143000" indent="-228600">
+              <a:defRPr>
+                <a:solidFill>
+                  <a:schemeClr val="tx1"/>
+                </a:solidFill>
+                <a:latin typeface="Calibri" panose="020F0502020204030204" pitchFamily="34" charset="0"/>
+              </a:defRPr>
+            </a:lvl3pPr>
+            <a:lvl4pPr marL="1600200" indent="-228600">
+              <a:defRPr>
+                <a:solidFill>
+                  <a:schemeClr val="tx1"/>
+                </a:solidFill>
+                <a:latin typeface="Calibri" panose="020F0502020204030204" pitchFamily="34" charset="0"/>
+              </a:defRPr>
+            </a:lvl4pPr>
+            <a:lvl5pPr marL="2057400" indent="-228600">
+              <a:defRPr>
+                <a:solidFill>
+                  <a:schemeClr val="tx1"/>
+                </a:solidFill>
+                <a:latin typeface="Calibri" panose="020F0502020204030204" pitchFamily="34" charset="0"/>
+              </a:defRPr>
+            </a:lvl5pPr>
+            <a:lvl6pPr marL="2514600" indent="-228600" eaLnBrk="0" fontAlgn="base" hangingPunct="0">
+              <a:spcBef>
+                <a:spcPct val="0"/>
+              </a:spcBef>
+              <a:spcAft>
+                <a:spcPct val="0"/>
+              </a:spcAft>
+              <a:defRPr>
+                <a:solidFill>
+                  <a:schemeClr val="tx1"/>
+                </a:solidFill>
+                <a:latin typeface="Calibri" panose="020F0502020204030204" pitchFamily="34" charset="0"/>
+              </a:defRPr>
+            </a:lvl6pPr>
+            <a:lvl7pPr marL="2971800" indent="-228600" eaLnBrk="0" fontAlgn="base" hangingPunct="0">
+              <a:spcBef>
+                <a:spcPct val="0"/>
+              </a:spcBef>
+              <a:spcAft>
+                <a:spcPct val="0"/>
+              </a:spcAft>
+              <a:defRPr>
+                <a:solidFill>
+                  <a:schemeClr val="tx1"/>
+                </a:solidFill>
+                <a:latin typeface="Calibri" panose="020F0502020204030204" pitchFamily="34" charset="0"/>
+              </a:defRPr>
+            </a:lvl7pPr>
+            <a:lvl8pPr marL="3429000" indent="-228600" eaLnBrk="0" fontAlgn="base" hangingPunct="0">
+              <a:spcBef>
+                <a:spcPct val="0"/>
+              </a:spcBef>
+              <a:spcAft>
+                <a:spcPct val="0"/>
+              </a:spcAft>
+              <a:defRPr>
+                <a:solidFill>
+                  <a:schemeClr val="tx1"/>
+                </a:solidFill>
+                <a:latin typeface="Calibri" panose="020F0502020204030204" pitchFamily="34" charset="0"/>
+              </a:defRPr>
+            </a:lvl8pPr>
+            <a:lvl9pPr marL="3886200" indent="-228600" eaLnBrk="0" fontAlgn="base" hangingPunct="0">
+              <a:spcBef>
+                <a:spcPct val="0"/>
+              </a:spcBef>
+              <a:spcAft>
+                <a:spcPct val="0"/>
+              </a:spcAft>
+              <a:defRPr>
+                <a:solidFill>
+                  <a:schemeClr val="tx1"/>
+                </a:solidFill>
+                <a:latin typeface="Calibri" panose="020F0502020204030204" pitchFamily="34" charset="0"/>
+              </a:defRPr>
+            </a:lvl9pPr>
+          </a:lstStyle>
+          <a:p>
+            <a:pPr algn="ctr" eaLnBrk="1" hangingPunct="1"/>
+            <a:r>
+              <a:rPr lang="en-US" altLang="en-US" sz="1100" dirty="0">
+                <a:latin typeface="Arial" panose="020B0604020202020204" pitchFamily="34" charset="0"/>
+                <a:ea typeface="Amazon Ember" panose="020B0603020204020204" pitchFamily="34" charset="0"/>
+                <a:cs typeface="Arial" panose="020B0604020202020204" pitchFamily="34" charset="0"/>
+              </a:rPr>
+              <a:t>AWS Secrets Manager</a:t>
+            </a:r>
+          </a:p>
+        </p:txBody>
+      </p:sp>
+      <p:sp>
+        <p:nvSpPr>
+          <p:cNvPr id="61" name="Rectangle 60">
+            <a:extLst>
+              <a:ext uri="{FF2B5EF4-FFF2-40B4-BE49-F238E27FC236}">
+                <a16:creationId xmlns:a16="http://schemas.microsoft.com/office/drawing/2014/main" id="{4E32D1D1-40B4-B2EC-1BDB-F2A17EBCDF08}"/>
+              </a:ext>
+            </a:extLst>
+          </p:cNvPr>
+          <p:cNvSpPr/>
+          <p:nvPr/>
+        </p:nvSpPr>
+        <p:spPr>
+          <a:xfrm>
+            <a:off x="6790338" y="1150957"/>
+            <a:ext cx="2632732" cy="1743565"/>
+          </a:xfrm>
+          <a:prstGeom prst="rect">
+            <a:avLst/>
+          </a:prstGeom>
+          <a:noFill/>
+          <a:ln w="12700">
+            <a:solidFill>
+              <a:srgbClr val="CD2264"/>
+            </a:solidFill>
+          </a:ln>
+        </p:spPr>
+        <p:style>
+          <a:lnRef idx="2">
+            <a:schemeClr val="accent1">
+              <a:shade val="50000"/>
+            </a:schemeClr>
+          </a:lnRef>
+          <a:fillRef idx="1">
+            <a:schemeClr val="accent1"/>
+          </a:fillRef>
+          <a:effectRef idx="0">
+            <a:schemeClr val="accent1"/>
+          </a:effectRef>
+          <a:fontRef idx="minor">
+            <a:schemeClr val="lt1"/>
+          </a:fontRef>
+        </p:style>
+        <p:txBody>
+          <a:bodyPr lIns="502920" tIns="91440"/>
+          <a:lstStyle/>
+          <a:p>
+            <a:pPr eaLnBrk="1" fontAlgn="auto" hangingPunct="1">
+              <a:spcBef>
+                <a:spcPts val="0"/>
+              </a:spcBef>
+              <a:spcAft>
+                <a:spcPts val="0"/>
+              </a:spcAft>
+              <a:defRPr/>
+            </a:pPr>
+            <a:r>
+              <a:rPr lang="en-US" sz="1200" dirty="0">
+                <a:solidFill>
+                  <a:srgbClr val="CD2264"/>
+                </a:solidFill>
+                <a:latin typeface="Arial" panose="020B0604020202020204" pitchFamily="34" charset="0"/>
+                <a:cs typeface="Arial" panose="020B0604020202020204" pitchFamily="34" charset="0"/>
+              </a:rPr>
+              <a:t>Amazon SNS</a:t>
+            </a:r>
+          </a:p>
+        </p:txBody>
+      </p:sp>
+      <p:pic>
+        <p:nvPicPr>
+          <p:cNvPr id="62" name="Graphic 61">
+            <a:extLst>
+              <a:ext uri="{FF2B5EF4-FFF2-40B4-BE49-F238E27FC236}">
+                <a16:creationId xmlns:a16="http://schemas.microsoft.com/office/drawing/2014/main" id="{D558BC02-ADBD-B295-93DE-91EC6F2851A8}"/>
+              </a:ext>
+            </a:extLst>
+          </p:cNvPr>
+          <p:cNvPicPr>
+            <a:picLocks noChangeAspect="1"/>
+          </p:cNvPicPr>
+          <p:nvPr/>
+        </p:nvPicPr>
+        <p:blipFill>
+          <a:blip r:embed="rId17">
+            <a:extLst>
+              <a:ext uri="{96DAC541-7B7A-43D3-8B79-37D633B846F1}">
+                <asvg:svgBlip xmlns:asvg="http://schemas.microsoft.com/office/drawing/2016/SVG/main" r:embed="rId18"/>
+              </a:ext>
+            </a:extLst>
+          </a:blip>
+          <a:srcRect/>
+          <a:stretch/>
+        </p:blipFill>
+        <p:spPr>
+          <a:xfrm>
+            <a:off x="6790337" y="1150957"/>
+            <a:ext cx="381000" cy="381000"/>
+          </a:xfrm>
+          <a:prstGeom prst="rect">
+            <a:avLst/>
+          </a:prstGeom>
+        </p:spPr>
+      </p:pic>
+      <p:sp>
+        <p:nvSpPr>
+          <p:cNvPr id="63" name="Rectangle 62">
+            <a:extLst>
+              <a:ext uri="{FF2B5EF4-FFF2-40B4-BE49-F238E27FC236}">
+                <a16:creationId xmlns:a16="http://schemas.microsoft.com/office/drawing/2014/main" id="{FBDB2EB3-E466-9199-0896-0AA136555777}"/>
+              </a:ext>
+            </a:extLst>
+          </p:cNvPr>
+          <p:cNvSpPr/>
+          <p:nvPr/>
+        </p:nvSpPr>
+        <p:spPr>
+          <a:xfrm>
+            <a:off x="1925351" y="1150959"/>
+            <a:ext cx="3302914" cy="1654794"/>
+          </a:xfrm>
+          <a:prstGeom prst="rect">
+            <a:avLst/>
+          </a:prstGeom>
+          <a:noFill/>
+          <a:ln w="12700">
+            <a:solidFill>
+              <a:srgbClr val="CD2264"/>
+            </a:solidFill>
+          </a:ln>
+        </p:spPr>
+        <p:style>
+          <a:lnRef idx="2">
+            <a:schemeClr val="accent1">
+              <a:shade val="50000"/>
+            </a:schemeClr>
+          </a:lnRef>
+          <a:fillRef idx="1">
+            <a:schemeClr val="accent1"/>
+          </a:fillRef>
+          <a:effectRef idx="0">
+            <a:schemeClr val="accent1"/>
+          </a:effectRef>
+          <a:fontRef idx="minor">
+            <a:schemeClr val="lt1"/>
+          </a:fontRef>
+        </p:style>
+        <p:txBody>
+          <a:bodyPr lIns="502920" tIns="91440"/>
+          <a:lstStyle/>
+          <a:p>
+            <a:pPr eaLnBrk="1" fontAlgn="auto" hangingPunct="1">
+              <a:spcBef>
+                <a:spcPts val="0"/>
+              </a:spcBef>
+              <a:spcAft>
+                <a:spcPts val="0"/>
+              </a:spcAft>
+              <a:defRPr/>
+            </a:pPr>
+            <a:r>
+              <a:rPr lang="en-US" sz="1200" dirty="0">
+                <a:solidFill>
+                  <a:srgbClr val="CD2264"/>
+                </a:solidFill>
+                <a:latin typeface="Arial" panose="020B0604020202020204" pitchFamily="34" charset="0"/>
+                <a:cs typeface="Arial" panose="020B0604020202020204" pitchFamily="34" charset="0"/>
+              </a:rPr>
+              <a:t>Amazon </a:t>
+            </a:r>
+            <a:r>
+              <a:rPr lang="en-US" sz="1200" dirty="0" err="1">
+                <a:solidFill>
+                  <a:srgbClr val="CD2264"/>
+                </a:solidFill>
+                <a:latin typeface="Arial" panose="020B0604020202020204" pitchFamily="34" charset="0"/>
+                <a:cs typeface="Arial" panose="020B0604020202020204" pitchFamily="34" charset="0"/>
+              </a:rPr>
+              <a:t>EventBridge</a:t>
+            </a:r>
+            <a:endParaRPr lang="en-US" sz="1200" dirty="0">
+              <a:solidFill>
+                <a:srgbClr val="CD2264"/>
+              </a:solidFill>
+              <a:latin typeface="Arial" panose="020B0604020202020204" pitchFamily="34" charset="0"/>
+              <a:cs typeface="Arial" panose="020B0604020202020204" pitchFamily="34" charset="0"/>
+            </a:endParaRPr>
+          </a:p>
+        </p:txBody>
+      </p:sp>
+      <p:pic>
+        <p:nvPicPr>
+          <p:cNvPr id="64" name="Graphic 63">
+            <a:extLst>
+              <a:ext uri="{FF2B5EF4-FFF2-40B4-BE49-F238E27FC236}">
+                <a16:creationId xmlns:a16="http://schemas.microsoft.com/office/drawing/2014/main" id="{3DF59882-5140-6A1F-6008-D2314970D280}"/>
+              </a:ext>
+            </a:extLst>
+          </p:cNvPr>
+          <p:cNvPicPr>
+            <a:picLocks noChangeAspect="1"/>
+          </p:cNvPicPr>
+          <p:nvPr/>
+        </p:nvPicPr>
+        <p:blipFill>
+          <a:blip r:embed="rId19">
+            <a:extLst>
+              <a:ext uri="{96DAC541-7B7A-43D3-8B79-37D633B846F1}">
+                <asvg:svgBlip xmlns:asvg="http://schemas.microsoft.com/office/drawing/2016/SVG/main" r:embed="rId20"/>
+              </a:ext>
+            </a:extLst>
+          </a:blip>
+          <a:srcRect/>
+          <a:stretch/>
+        </p:blipFill>
+        <p:spPr>
+          <a:xfrm>
+            <a:off x="1925350" y="1152366"/>
+            <a:ext cx="381000" cy="381000"/>
+          </a:xfrm>
+          <a:prstGeom prst="rect">
+            <a:avLst/>
+          </a:prstGeom>
+        </p:spPr>
+      </p:pic>
+      <p:cxnSp>
+        <p:nvCxnSpPr>
+          <p:cNvPr id="66" name="Straight Arrow Connector 65">
+            <a:extLst>
+              <a:ext uri="{FF2B5EF4-FFF2-40B4-BE49-F238E27FC236}">
+                <a16:creationId xmlns:a16="http://schemas.microsoft.com/office/drawing/2014/main" id="{817EAE73-D5FA-0263-3B5E-5AB743EE4FDC}"/>
+              </a:ext>
+            </a:extLst>
+          </p:cNvPr>
+          <p:cNvCxnSpPr>
+            <a:cxnSpLocks/>
+          </p:cNvCxnSpPr>
+          <p:nvPr/>
+        </p:nvCxnSpPr>
+        <p:spPr>
+          <a:xfrm flipH="1">
+            <a:off x="2481267" y="3426915"/>
+            <a:ext cx="915218" cy="0"/>
+          </a:xfrm>
+          <a:prstGeom prst="straightConnector1">
+            <a:avLst/>
+          </a:prstGeom>
+          <a:ln w="12700">
+            <a:solidFill>
+              <a:srgbClr val="545B64"/>
+            </a:solidFill>
+            <a:headEnd type="none" w="med" len="sm"/>
+            <a:tailEnd type="arrow" w="med" len="sm"/>
+          </a:ln>
+        </p:spPr>
+        <p:style>
+          <a:lnRef idx="1">
+            <a:schemeClr val="accent1"/>
+          </a:lnRef>
+          <a:fillRef idx="0">
+            <a:schemeClr val="accent1"/>
+          </a:fillRef>
+          <a:effectRef idx="0">
+            <a:schemeClr val="accent1"/>
+          </a:effectRef>
+          <a:fontRef idx="minor">
+            <a:schemeClr val="tx1"/>
+          </a:fontRef>
+        </p:style>
+      </p:cxnSp>
+      <p:sp>
+        <p:nvSpPr>
+          <p:cNvPr id="70" name="Freeform 69">
+            <a:extLst>
+              <a:ext uri="{FF2B5EF4-FFF2-40B4-BE49-F238E27FC236}">
+                <a16:creationId xmlns:a16="http://schemas.microsoft.com/office/drawing/2014/main" id="{7B18F454-94B4-C4F1-4684-8C7FBF75E856}"/>
+              </a:ext>
+            </a:extLst>
+          </p:cNvPr>
+          <p:cNvSpPr/>
+          <p:nvPr/>
+        </p:nvSpPr>
+        <p:spPr>
+          <a:xfrm rot="5400000" flipH="1">
+            <a:off x="2905651" y="2245672"/>
+            <a:ext cx="840884" cy="734027"/>
+          </a:xfrm>
+          <a:custGeom>
+            <a:avLst/>
+            <a:gdLst>
+              <a:gd name="connsiteX0" fmla="*/ 1371600 w 1371600"/>
+              <a:gd name="connsiteY0" fmla="*/ 711200 h 711200"/>
+              <a:gd name="connsiteX1" fmla="*/ 1371600 w 1371600"/>
+              <a:gd name="connsiteY1" fmla="*/ 0 h 711200"/>
+              <a:gd name="connsiteX2" fmla="*/ 0 w 1371600"/>
+              <a:gd name="connsiteY2" fmla="*/ 0 h 711200"/>
+            </a:gdLst>
+            <a:ahLst/>
+            <a:cxnLst>
+              <a:cxn ang="0">
+                <a:pos x="connsiteX0" y="connsiteY0"/>
+              </a:cxn>
+              <a:cxn ang="0">
+                <a:pos x="connsiteX1" y="connsiteY1"/>
+              </a:cxn>
+              <a:cxn ang="0">
+                <a:pos x="connsiteX2" y="connsiteY2"/>
+              </a:cxn>
+            </a:cxnLst>
+            <a:rect l="l" t="t" r="r" b="b"/>
+            <a:pathLst>
+              <a:path w="1371600" h="711200">
+                <a:moveTo>
+                  <a:pt x="1371600" y="711200"/>
+                </a:moveTo>
+                <a:lnTo>
+                  <a:pt x="1371600" y="0"/>
+                </a:lnTo>
+                <a:lnTo>
+                  <a:pt x="0" y="0"/>
+                </a:lnTo>
+              </a:path>
+            </a:pathLst>
+          </a:custGeom>
+          <a:noFill/>
+          <a:ln w="12700">
+            <a:solidFill>
+              <a:schemeClr val="tx2"/>
+            </a:solidFill>
+            <a:headEnd type="none" w="med" len="sm"/>
+            <a:tailEnd type="arrow" w="med" len="sm"/>
+          </a:ln>
+        </p:spPr>
+        <p:style>
+          <a:lnRef idx="2">
+            <a:schemeClr val="accent1">
+              <a:shade val="50000"/>
+            </a:schemeClr>
+          </a:lnRef>
+          <a:fillRef idx="1">
+            <a:schemeClr val="accent1"/>
+          </a:fillRef>
+          <a:effectRef idx="0">
+            <a:schemeClr val="accent1"/>
+          </a:effectRef>
+          <a:fontRef idx="minor">
+            <a:schemeClr val="lt1"/>
+          </a:fontRef>
+        </p:style>
+        <p:txBody>
+          <a:bodyPr anchor="ctr"/>
+          <a:lstStyle/>
+          <a:p>
+            <a:pPr algn="ctr" eaLnBrk="1" fontAlgn="auto" hangingPunct="1">
+              <a:spcBef>
+                <a:spcPts val="0"/>
+              </a:spcBef>
+              <a:spcAft>
+                <a:spcPts val="0"/>
+              </a:spcAft>
+              <a:defRPr/>
+            </a:pPr>
+            <a:endParaRPr lang="en-US" dirty="0"/>
+          </a:p>
+        </p:txBody>
+      </p:sp>
+      <p:sp>
+        <p:nvSpPr>
+          <p:cNvPr id="75" name="Oval 74">
+            <a:extLst>
+              <a:ext uri="{FF2B5EF4-FFF2-40B4-BE49-F238E27FC236}">
+                <a16:creationId xmlns:a16="http://schemas.microsoft.com/office/drawing/2014/main" id="{FB899F01-7150-C341-BFC6-EE9F01130401}"/>
+              </a:ext>
+            </a:extLst>
+          </p:cNvPr>
+          <p:cNvSpPr>
+            <a:spLocks noChangeAspect="1"/>
+          </p:cNvSpPr>
+          <p:nvPr/>
+        </p:nvSpPr>
+        <p:spPr bwMode="auto">
+          <a:xfrm>
+            <a:off x="3418787" y="1832693"/>
+            <a:ext cx="274320" cy="274320"/>
+          </a:xfrm>
+          <a:prstGeom prst="ellipse">
+            <a:avLst/>
+          </a:prstGeom>
+          <a:solidFill>
+            <a:schemeClr val="tx1"/>
+          </a:solidFill>
+          <a:ln w="12700">
+            <a:noFill/>
+          </a:ln>
+        </p:spPr>
+        <p:style>
+          <a:lnRef idx="2">
+            <a:schemeClr val="accent1">
+              <a:shade val="50000"/>
+            </a:schemeClr>
+          </a:lnRef>
+          <a:fillRef idx="1">
+            <a:schemeClr val="accent1"/>
+          </a:fillRef>
+          <a:effectRef idx="0">
+            <a:schemeClr val="accent1"/>
+          </a:effectRef>
+          <a:fontRef idx="minor">
+            <a:schemeClr val="lt1"/>
+          </a:fontRef>
+        </p:style>
+        <p:txBody>
+          <a:bodyPr lIns="0" tIns="0" rIns="0" bIns="0" anchor="ctr" anchorCtr="0"/>
+          <a:lstStyle/>
+          <a:p>
+            <a:pPr algn="ctr" eaLnBrk="1" fontAlgn="auto" hangingPunct="1">
+              <a:spcBef>
+                <a:spcPts val="0"/>
+              </a:spcBef>
+              <a:spcAft>
+                <a:spcPts val="0"/>
+              </a:spcAft>
+              <a:defRPr/>
+            </a:pPr>
+            <a:r>
+              <a:rPr lang="en-US" sz="1100" b="1" dirty="0">
+                <a:solidFill>
+                  <a:schemeClr val="bg1"/>
+                </a:solidFill>
+                <a:latin typeface="Arial" panose="020B0604020202020204" pitchFamily="34" charset="0"/>
+                <a:cs typeface="Arial" panose="020B0604020202020204" pitchFamily="34" charset="0"/>
+              </a:rPr>
+              <a:t>1</a:t>
+            </a:r>
+          </a:p>
+        </p:txBody>
+      </p:sp>
+      <p:sp>
+        <p:nvSpPr>
+          <p:cNvPr id="76" name="Oval 75">
+            <a:extLst>
+              <a:ext uri="{FF2B5EF4-FFF2-40B4-BE49-F238E27FC236}">
+                <a16:creationId xmlns:a16="http://schemas.microsoft.com/office/drawing/2014/main" id="{81490B53-AAD7-6753-4D66-8FC81E3B95DC}"/>
+              </a:ext>
+            </a:extLst>
+          </p:cNvPr>
+          <p:cNvSpPr>
+            <a:spLocks noChangeAspect="1"/>
+          </p:cNvSpPr>
+          <p:nvPr/>
+        </p:nvSpPr>
+        <p:spPr bwMode="auto">
+          <a:xfrm>
+            <a:off x="2902113" y="3077909"/>
+            <a:ext cx="274320" cy="274320"/>
+          </a:xfrm>
+          <a:prstGeom prst="ellipse">
+            <a:avLst/>
+          </a:prstGeom>
+          <a:solidFill>
+            <a:schemeClr val="tx1"/>
+          </a:solidFill>
+          <a:ln w="12700">
+            <a:noFill/>
+          </a:ln>
+        </p:spPr>
+        <p:style>
+          <a:lnRef idx="2">
+            <a:schemeClr val="accent1">
+              <a:shade val="50000"/>
+            </a:schemeClr>
+          </a:lnRef>
+          <a:fillRef idx="1">
+            <a:schemeClr val="accent1"/>
+          </a:fillRef>
+          <a:effectRef idx="0">
+            <a:schemeClr val="accent1"/>
+          </a:effectRef>
+          <a:fontRef idx="minor">
+            <a:schemeClr val="lt1"/>
+          </a:fontRef>
+        </p:style>
+        <p:txBody>
+          <a:bodyPr lIns="0" tIns="0" rIns="0" bIns="0" anchor="ctr" anchorCtr="0"/>
+          <a:lstStyle/>
+          <a:p>
+            <a:pPr algn="ctr" eaLnBrk="1" fontAlgn="auto" hangingPunct="1">
+              <a:spcBef>
+                <a:spcPts val="0"/>
+              </a:spcBef>
+              <a:spcAft>
+                <a:spcPts val="0"/>
+              </a:spcAft>
+              <a:defRPr/>
+            </a:pPr>
+            <a:r>
+              <a:rPr lang="en-US" sz="1100" b="1" dirty="0">
+                <a:solidFill>
+                  <a:schemeClr val="bg1"/>
+                </a:solidFill>
+                <a:latin typeface="Arial" panose="020B0604020202020204" pitchFamily="34" charset="0"/>
+                <a:cs typeface="Arial" panose="020B0604020202020204" pitchFamily="34" charset="0"/>
+              </a:rPr>
+              <a:t>2</a:t>
+            </a:r>
+          </a:p>
+        </p:txBody>
+      </p:sp>
+      <p:sp>
+        <p:nvSpPr>
+          <p:cNvPr id="77" name="Oval 76">
+            <a:extLst>
+              <a:ext uri="{FF2B5EF4-FFF2-40B4-BE49-F238E27FC236}">
+                <a16:creationId xmlns:a16="http://schemas.microsoft.com/office/drawing/2014/main" id="{B6791E55-05A5-A7BC-4704-F54E8EDC1074}"/>
+              </a:ext>
+            </a:extLst>
+          </p:cNvPr>
+          <p:cNvSpPr>
+            <a:spLocks noChangeAspect="1"/>
+          </p:cNvSpPr>
+          <p:nvPr/>
+        </p:nvSpPr>
+        <p:spPr bwMode="auto">
+          <a:xfrm>
+            <a:off x="3835095" y="4323125"/>
+            <a:ext cx="274320" cy="274320"/>
+          </a:xfrm>
+          <a:prstGeom prst="ellipse">
+            <a:avLst/>
+          </a:prstGeom>
+          <a:solidFill>
+            <a:schemeClr val="tx1"/>
+          </a:solidFill>
+          <a:ln w="12700">
+            <a:noFill/>
+          </a:ln>
+        </p:spPr>
+        <p:style>
+          <a:lnRef idx="2">
+            <a:schemeClr val="accent1">
+              <a:shade val="50000"/>
+            </a:schemeClr>
+          </a:lnRef>
+          <a:fillRef idx="1">
+            <a:schemeClr val="accent1"/>
+          </a:fillRef>
+          <a:effectRef idx="0">
+            <a:schemeClr val="accent1"/>
+          </a:effectRef>
+          <a:fontRef idx="minor">
+            <a:schemeClr val="lt1"/>
+          </a:fontRef>
+        </p:style>
+        <p:txBody>
+          <a:bodyPr lIns="0" tIns="0" rIns="0" bIns="0" anchor="ctr" anchorCtr="0"/>
+          <a:lstStyle/>
+          <a:p>
+            <a:pPr algn="ctr" eaLnBrk="1" fontAlgn="auto" hangingPunct="1">
+              <a:spcBef>
+                <a:spcPts val="0"/>
+              </a:spcBef>
+              <a:spcAft>
+                <a:spcPts val="0"/>
+              </a:spcAft>
+              <a:defRPr/>
+            </a:pPr>
+            <a:r>
+              <a:rPr lang="en-US" sz="1100" b="1" dirty="0">
+                <a:solidFill>
+                  <a:schemeClr val="bg1"/>
+                </a:solidFill>
+                <a:latin typeface="Arial" panose="020B0604020202020204" pitchFamily="34" charset="0"/>
+                <a:cs typeface="Arial" panose="020B0604020202020204" pitchFamily="34" charset="0"/>
+              </a:rPr>
+              <a:t>3</a:t>
+            </a:r>
+          </a:p>
+        </p:txBody>
+      </p:sp>
+      <p:sp>
+        <p:nvSpPr>
+          <p:cNvPr id="78" name="Oval 77">
+            <a:extLst>
+              <a:ext uri="{FF2B5EF4-FFF2-40B4-BE49-F238E27FC236}">
+                <a16:creationId xmlns:a16="http://schemas.microsoft.com/office/drawing/2014/main" id="{BAD449E8-B05D-C12B-58E7-D6C93CA45FD7}"/>
+              </a:ext>
+            </a:extLst>
+          </p:cNvPr>
+          <p:cNvSpPr>
+            <a:spLocks noChangeAspect="1"/>
+          </p:cNvSpPr>
+          <p:nvPr/>
+        </p:nvSpPr>
+        <p:spPr bwMode="auto">
+          <a:xfrm>
+            <a:off x="2638194" y="5200358"/>
+            <a:ext cx="274320" cy="274320"/>
+          </a:xfrm>
+          <a:prstGeom prst="ellipse">
+            <a:avLst/>
+          </a:prstGeom>
+          <a:solidFill>
+            <a:schemeClr val="tx1"/>
+          </a:solidFill>
+          <a:ln w="12700">
+            <a:noFill/>
+          </a:ln>
+        </p:spPr>
+        <p:style>
+          <a:lnRef idx="2">
+            <a:schemeClr val="accent1">
+              <a:shade val="50000"/>
+            </a:schemeClr>
+          </a:lnRef>
+          <a:fillRef idx="1">
+            <a:schemeClr val="accent1"/>
+          </a:fillRef>
+          <a:effectRef idx="0">
+            <a:schemeClr val="accent1"/>
+          </a:effectRef>
+          <a:fontRef idx="minor">
+            <a:schemeClr val="lt1"/>
+          </a:fontRef>
+        </p:style>
+        <p:txBody>
+          <a:bodyPr lIns="0" tIns="0" rIns="0" bIns="0" anchor="ctr" anchorCtr="0"/>
+          <a:lstStyle/>
+          <a:p>
+            <a:pPr algn="ctr" eaLnBrk="1" fontAlgn="auto" hangingPunct="1">
+              <a:spcBef>
+                <a:spcPts val="0"/>
+              </a:spcBef>
+              <a:spcAft>
+                <a:spcPts val="0"/>
+              </a:spcAft>
+              <a:defRPr/>
+            </a:pPr>
+            <a:r>
+              <a:rPr lang="en-US" sz="1100" b="1" dirty="0">
+                <a:solidFill>
+                  <a:schemeClr val="bg1"/>
+                </a:solidFill>
+                <a:latin typeface="Arial" panose="020B0604020202020204" pitchFamily="34" charset="0"/>
+                <a:cs typeface="Arial" panose="020B0604020202020204" pitchFamily="34" charset="0"/>
+              </a:rPr>
+              <a:t>4</a:t>
+            </a:r>
+          </a:p>
+        </p:txBody>
+      </p:sp>
+      <p:sp>
+        <p:nvSpPr>
+          <p:cNvPr id="79" name="Oval 78">
+            <a:extLst>
+              <a:ext uri="{FF2B5EF4-FFF2-40B4-BE49-F238E27FC236}">
+                <a16:creationId xmlns:a16="http://schemas.microsoft.com/office/drawing/2014/main" id="{52BBC82D-2BA5-6895-B726-F568900C9458}"/>
+              </a:ext>
+            </a:extLst>
+          </p:cNvPr>
+          <p:cNvSpPr>
+            <a:spLocks noChangeAspect="1"/>
+          </p:cNvSpPr>
+          <p:nvPr/>
+        </p:nvSpPr>
+        <p:spPr bwMode="auto">
+          <a:xfrm>
+            <a:off x="4619391" y="5200358"/>
+            <a:ext cx="274320" cy="274320"/>
+          </a:xfrm>
+          <a:prstGeom prst="ellipse">
+            <a:avLst/>
+          </a:prstGeom>
+          <a:solidFill>
+            <a:schemeClr val="tx1"/>
+          </a:solidFill>
+          <a:ln w="12700">
+            <a:noFill/>
+          </a:ln>
+        </p:spPr>
+        <p:style>
+          <a:lnRef idx="2">
+            <a:schemeClr val="accent1">
+              <a:shade val="50000"/>
+            </a:schemeClr>
+          </a:lnRef>
+          <a:fillRef idx="1">
+            <a:schemeClr val="accent1"/>
+          </a:fillRef>
+          <a:effectRef idx="0">
+            <a:schemeClr val="accent1"/>
+          </a:effectRef>
+          <a:fontRef idx="minor">
+            <a:schemeClr val="lt1"/>
+          </a:fontRef>
+        </p:style>
+        <p:txBody>
+          <a:bodyPr lIns="0" tIns="0" rIns="0" bIns="0" anchor="ctr" anchorCtr="0"/>
+          <a:lstStyle/>
+          <a:p>
+            <a:pPr algn="ctr" eaLnBrk="1" fontAlgn="auto" hangingPunct="1">
+              <a:spcBef>
+                <a:spcPts val="0"/>
+              </a:spcBef>
+              <a:spcAft>
+                <a:spcPts val="0"/>
+              </a:spcAft>
+              <a:defRPr/>
+            </a:pPr>
+            <a:r>
+              <a:rPr lang="en-US" sz="1100" b="1" dirty="0">
+                <a:solidFill>
+                  <a:schemeClr val="bg1"/>
+                </a:solidFill>
+                <a:latin typeface="Arial" panose="020B0604020202020204" pitchFamily="34" charset="0"/>
+                <a:cs typeface="Arial" panose="020B0604020202020204" pitchFamily="34" charset="0"/>
+              </a:rPr>
+              <a:t>5</a:t>
+            </a:r>
+          </a:p>
+        </p:txBody>
+      </p:sp>
+      <p:sp>
+        <p:nvSpPr>
+          <p:cNvPr id="80" name="Oval 79">
+            <a:extLst>
+              <a:ext uri="{FF2B5EF4-FFF2-40B4-BE49-F238E27FC236}">
+                <a16:creationId xmlns:a16="http://schemas.microsoft.com/office/drawing/2014/main" id="{9C662559-8E79-7D28-EDC0-0AD6466A6324}"/>
+              </a:ext>
+            </a:extLst>
+          </p:cNvPr>
+          <p:cNvSpPr>
+            <a:spLocks noChangeAspect="1"/>
+          </p:cNvSpPr>
+          <p:nvPr/>
+        </p:nvSpPr>
+        <p:spPr bwMode="auto">
+          <a:xfrm>
+            <a:off x="4849851" y="3077909"/>
+            <a:ext cx="274320" cy="274320"/>
+          </a:xfrm>
+          <a:prstGeom prst="ellipse">
+            <a:avLst/>
+          </a:prstGeom>
+          <a:solidFill>
+            <a:schemeClr val="tx1"/>
+          </a:solidFill>
+          <a:ln w="12700">
+            <a:noFill/>
+          </a:ln>
+        </p:spPr>
+        <p:style>
+          <a:lnRef idx="2">
+            <a:schemeClr val="accent1">
+              <a:shade val="50000"/>
+            </a:schemeClr>
+          </a:lnRef>
+          <a:fillRef idx="1">
+            <a:schemeClr val="accent1"/>
+          </a:fillRef>
+          <a:effectRef idx="0">
+            <a:schemeClr val="accent1"/>
+          </a:effectRef>
+          <a:fontRef idx="minor">
+            <a:schemeClr val="lt1"/>
+          </a:fontRef>
+        </p:style>
+        <p:txBody>
+          <a:bodyPr lIns="0" tIns="0" rIns="0" bIns="0" anchor="ctr" anchorCtr="0"/>
+          <a:lstStyle/>
+          <a:p>
+            <a:pPr algn="ctr" eaLnBrk="1" fontAlgn="auto" hangingPunct="1">
+              <a:spcBef>
+                <a:spcPts val="0"/>
+              </a:spcBef>
+              <a:spcAft>
+                <a:spcPts val="0"/>
+              </a:spcAft>
+              <a:defRPr/>
+            </a:pPr>
+            <a:r>
+              <a:rPr lang="en-US" sz="1100" b="1" dirty="0">
+                <a:solidFill>
+                  <a:schemeClr val="bg1"/>
+                </a:solidFill>
+                <a:latin typeface="Arial" panose="020B0604020202020204" pitchFamily="34" charset="0"/>
+                <a:cs typeface="Arial" panose="020B0604020202020204" pitchFamily="34" charset="0"/>
+              </a:rPr>
+              <a:t>6</a:t>
+            </a:r>
+          </a:p>
+        </p:txBody>
+      </p:sp>
+      <p:sp>
+        <p:nvSpPr>
+          <p:cNvPr id="81" name="Oval 80">
+            <a:extLst>
+              <a:ext uri="{FF2B5EF4-FFF2-40B4-BE49-F238E27FC236}">
+                <a16:creationId xmlns:a16="http://schemas.microsoft.com/office/drawing/2014/main" id="{95791702-56A3-32FC-9ED7-CB4619FAF6BE}"/>
+              </a:ext>
+            </a:extLst>
+          </p:cNvPr>
+          <p:cNvSpPr>
+            <a:spLocks noChangeAspect="1"/>
+          </p:cNvSpPr>
+          <p:nvPr/>
+        </p:nvSpPr>
+        <p:spPr bwMode="auto">
+          <a:xfrm>
+            <a:off x="5269878" y="1832693"/>
+            <a:ext cx="274320" cy="274320"/>
+          </a:xfrm>
+          <a:prstGeom prst="ellipse">
+            <a:avLst/>
+          </a:prstGeom>
+          <a:solidFill>
+            <a:schemeClr val="tx1"/>
+          </a:solidFill>
+          <a:ln w="12700">
+            <a:noFill/>
+          </a:ln>
+        </p:spPr>
+        <p:style>
+          <a:lnRef idx="2">
+            <a:schemeClr val="accent1">
+              <a:shade val="50000"/>
+            </a:schemeClr>
+          </a:lnRef>
+          <a:fillRef idx="1">
+            <a:schemeClr val="accent1"/>
+          </a:fillRef>
+          <a:effectRef idx="0">
+            <a:schemeClr val="accent1"/>
+          </a:effectRef>
+          <a:fontRef idx="minor">
+            <a:schemeClr val="lt1"/>
+          </a:fontRef>
+        </p:style>
+        <p:txBody>
+          <a:bodyPr lIns="0" tIns="0" rIns="0" bIns="0" anchor="ctr" anchorCtr="0"/>
+          <a:lstStyle/>
+          <a:p>
+            <a:pPr algn="ctr" eaLnBrk="1" fontAlgn="auto" hangingPunct="1">
+              <a:spcBef>
+                <a:spcPts val="0"/>
+              </a:spcBef>
+              <a:spcAft>
+                <a:spcPts val="0"/>
+              </a:spcAft>
+              <a:defRPr/>
+            </a:pPr>
+            <a:r>
+              <a:rPr lang="en-US" sz="1100" b="1" dirty="0">
+                <a:solidFill>
+                  <a:schemeClr val="bg1"/>
+                </a:solidFill>
+                <a:latin typeface="Arial" panose="020B0604020202020204" pitchFamily="34" charset="0"/>
+                <a:cs typeface="Arial" panose="020B0604020202020204" pitchFamily="34" charset="0"/>
+              </a:rPr>
+              <a:t>7</a:t>
+            </a:r>
+          </a:p>
+        </p:txBody>
+      </p:sp>
+      <p:sp>
+        <p:nvSpPr>
+          <p:cNvPr id="82" name="Oval 81">
+            <a:extLst>
+              <a:ext uri="{FF2B5EF4-FFF2-40B4-BE49-F238E27FC236}">
+                <a16:creationId xmlns:a16="http://schemas.microsoft.com/office/drawing/2014/main" id="{A53EFE3F-FBF0-EE09-928D-FD430E0700E0}"/>
+              </a:ext>
+            </a:extLst>
+          </p:cNvPr>
+          <p:cNvSpPr>
+            <a:spLocks noChangeAspect="1"/>
+          </p:cNvSpPr>
+          <p:nvPr/>
+        </p:nvSpPr>
+        <p:spPr bwMode="auto">
+          <a:xfrm>
+            <a:off x="6570854" y="1832693"/>
+            <a:ext cx="274320" cy="274320"/>
+          </a:xfrm>
+          <a:prstGeom prst="ellipse">
+            <a:avLst/>
+          </a:prstGeom>
+          <a:solidFill>
+            <a:schemeClr val="tx1"/>
+          </a:solidFill>
+          <a:ln w="12700">
+            <a:noFill/>
+          </a:ln>
+        </p:spPr>
+        <p:style>
+          <a:lnRef idx="2">
+            <a:schemeClr val="accent1">
+              <a:shade val="50000"/>
+            </a:schemeClr>
+          </a:lnRef>
+          <a:fillRef idx="1">
+            <a:schemeClr val="accent1"/>
+          </a:fillRef>
+          <a:effectRef idx="0">
+            <a:schemeClr val="accent1"/>
+          </a:effectRef>
+          <a:fontRef idx="minor">
+            <a:schemeClr val="lt1"/>
+          </a:fontRef>
+        </p:style>
+        <p:txBody>
+          <a:bodyPr lIns="0" tIns="0" rIns="0" bIns="0" anchor="ctr" anchorCtr="0"/>
+          <a:lstStyle/>
+          <a:p>
+            <a:pPr algn="ctr" eaLnBrk="1" fontAlgn="auto" hangingPunct="1">
+              <a:spcBef>
+                <a:spcPts val="0"/>
+              </a:spcBef>
+              <a:spcAft>
+                <a:spcPts val="0"/>
+              </a:spcAft>
+              <a:defRPr/>
+            </a:pPr>
+            <a:r>
+              <a:rPr lang="en-US" sz="1100" b="1" dirty="0">
+                <a:solidFill>
+                  <a:schemeClr val="bg1"/>
+                </a:solidFill>
+                <a:latin typeface="Arial" panose="020B0604020202020204" pitchFamily="34" charset="0"/>
+                <a:cs typeface="Arial" panose="020B0604020202020204" pitchFamily="34" charset="0"/>
+              </a:rPr>
+              <a:t>8</a:t>
+            </a:r>
+          </a:p>
+        </p:txBody>
+      </p:sp>
+      <p:sp>
+        <p:nvSpPr>
+          <p:cNvPr id="83" name="Oval 82">
+            <a:extLst>
+              <a:ext uri="{FF2B5EF4-FFF2-40B4-BE49-F238E27FC236}">
+                <a16:creationId xmlns:a16="http://schemas.microsoft.com/office/drawing/2014/main" id="{9B05DDA0-8A5A-48DC-7C4C-2CE97C5ADA3F}"/>
+              </a:ext>
+            </a:extLst>
+          </p:cNvPr>
+          <p:cNvSpPr>
+            <a:spLocks noChangeAspect="1"/>
+          </p:cNvSpPr>
+          <p:nvPr/>
+        </p:nvSpPr>
+        <p:spPr bwMode="auto">
+          <a:xfrm>
+            <a:off x="7860679" y="1832693"/>
+            <a:ext cx="274320" cy="274320"/>
+          </a:xfrm>
+          <a:prstGeom prst="ellipse">
+            <a:avLst/>
+          </a:prstGeom>
+          <a:solidFill>
+            <a:schemeClr val="tx1"/>
+          </a:solidFill>
+          <a:ln w="12700">
+            <a:noFill/>
+          </a:ln>
+        </p:spPr>
+        <p:style>
+          <a:lnRef idx="2">
+            <a:schemeClr val="accent1">
+              <a:shade val="50000"/>
+            </a:schemeClr>
+          </a:lnRef>
+          <a:fillRef idx="1">
+            <a:schemeClr val="accent1"/>
+          </a:fillRef>
+          <a:effectRef idx="0">
+            <a:schemeClr val="accent1"/>
+          </a:effectRef>
+          <a:fontRef idx="minor">
+            <a:schemeClr val="lt1"/>
+          </a:fontRef>
+        </p:style>
+        <p:txBody>
+          <a:bodyPr lIns="0" tIns="0" rIns="0" bIns="0" anchor="ctr" anchorCtr="0"/>
+          <a:lstStyle/>
+          <a:p>
+            <a:pPr algn="ctr" eaLnBrk="1" fontAlgn="auto" hangingPunct="1">
+              <a:spcBef>
+                <a:spcPts val="0"/>
+              </a:spcBef>
+              <a:spcAft>
+                <a:spcPts val="0"/>
+              </a:spcAft>
+              <a:defRPr/>
+            </a:pPr>
+            <a:r>
+              <a:rPr lang="en-US" sz="1100" b="1" dirty="0">
+                <a:solidFill>
+                  <a:schemeClr val="bg1"/>
+                </a:solidFill>
+                <a:latin typeface="Arial" panose="020B0604020202020204" pitchFamily="34" charset="0"/>
+                <a:cs typeface="Arial" panose="020B0604020202020204" pitchFamily="34" charset="0"/>
+              </a:rPr>
+              <a:t>9</a:t>
+            </a:r>
+          </a:p>
+        </p:txBody>
+      </p:sp>
+      <p:pic>
+        <p:nvPicPr>
+          <p:cNvPr id="1026" name="Picture 2">
+            <a:extLst>
+              <a:ext uri="{FF2B5EF4-FFF2-40B4-BE49-F238E27FC236}">
+                <a16:creationId xmlns:a16="http://schemas.microsoft.com/office/drawing/2014/main" id="{371447A5-1450-641D-BA9F-84AB3C855603}"/>
+              </a:ext>
+            </a:extLst>
+          </p:cNvPr>
+          <p:cNvPicPr>
+            <a:picLocks noChangeAspect="1" noChangeArrowheads="1"/>
+          </p:cNvPicPr>
+          <p:nvPr/>
+        </p:nvPicPr>
+        <p:blipFill>
+          <a:blip r:embed="rId21">
+            <a:extLst>
+              <a:ext uri="{28A0092B-C50C-407E-A947-70E740481C1C}">
+                <a14:useLocalDpi xmlns:a14="http://schemas.microsoft.com/office/drawing/2010/main" val="0"/>
+              </a:ext>
+            </a:extLst>
+          </a:blip>
+          <a:srcRect/>
+          <a:stretch>
+            <a:fillRect/>
+          </a:stretch>
+        </p:blipFill>
+        <p:spPr bwMode="auto">
+          <a:xfrm>
+            <a:off x="424185" y="5347486"/>
+            <a:ext cx="425536" cy="381487"/>
+          </a:xfrm>
+          <a:prstGeom prst="rect">
+            <a:avLst/>
+          </a:prstGeom>
+          <a:noFill/>
+          <a:extLst>
+            <a:ext uri="{909E8E84-426E-40DD-AFC4-6F175D3DCCD1}">
+              <a14:hiddenFill xmlns:a14="http://schemas.microsoft.com/office/drawing/2010/main">
+                <a:solidFill>
+                  <a:srgbClr val="FFFFFF"/>
+                </a:solidFill>
+              </a14:hiddenFill>
+            </a:ext>
+          </a:extLst>
+        </p:spPr>
+      </p:pic>
+      <p:sp>
+        <p:nvSpPr>
+          <p:cNvPr id="88" name="TextBox 12">
+            <a:extLst>
+              <a:ext uri="{FF2B5EF4-FFF2-40B4-BE49-F238E27FC236}">
+                <a16:creationId xmlns:a16="http://schemas.microsoft.com/office/drawing/2014/main" id="{FF8B1528-57F4-86AA-1289-8157AD79528A}"/>
+              </a:ext>
+            </a:extLst>
+          </p:cNvPr>
+          <p:cNvSpPr txBox="1">
+            <a:spLocks noChangeArrowheads="1"/>
+          </p:cNvSpPr>
+          <p:nvPr/>
+        </p:nvSpPr>
+        <p:spPr bwMode="auto">
+          <a:xfrm>
+            <a:off x="-82255" y="5800715"/>
+            <a:ext cx="1403350" cy="261610"/>
+          </a:xfrm>
+          <a:prstGeom prst="rect">
+            <a:avLst/>
+          </a:prstGeom>
+          <a:noFill/>
+          <a:ln>
+            <a:noFill/>
+          </a:ln>
+          <a:extLst>
+            <a:ext uri="{909E8E84-426E-40DD-AFC4-6F175D3DCCD1}">
+              <a14:hiddenFill xmlns:a14="http://schemas.microsoft.com/office/drawing/2010/main">
+                <a:solidFill>
+                  <a:srgbClr val="FFFFFF"/>
+                </a:solidFill>
+              </a14:hiddenFill>
+            </a:ext>
+            <a:ext uri="{91240B29-F687-4F45-9708-019B960494DF}">
+              <a14:hiddenLine xmlns:a14="http://schemas.microsoft.com/office/drawing/2010/main" w="9525">
+                <a:solidFill>
+                  <a:srgbClr val="000000"/>
+                </a:solidFill>
+                <a:miter lim="800000"/>
+                <a:headEnd/>
+                <a:tailEnd/>
+              </a14:hiddenLine>
+            </a:ext>
+          </a:extLst>
+        </p:spPr>
+        <p:txBody>
+          <a:bodyPr>
+            <a:spAutoFit/>
+          </a:bodyPr>
+          <a:lstStyle>
+            <a:lvl1pPr>
+              <a:defRPr>
+                <a:solidFill>
+                  <a:schemeClr val="tx1"/>
+                </a:solidFill>
+                <a:latin typeface="Calibri" panose="020F0502020204030204" pitchFamily="34" charset="0"/>
+              </a:defRPr>
+            </a:lvl1pPr>
+            <a:lvl2pPr marL="742950" indent="-285750">
+              <a:defRPr>
+                <a:solidFill>
+                  <a:schemeClr val="tx1"/>
+                </a:solidFill>
+                <a:latin typeface="Calibri" panose="020F0502020204030204" pitchFamily="34" charset="0"/>
+              </a:defRPr>
+            </a:lvl2pPr>
+            <a:lvl3pPr marL="1143000" indent="-228600">
+              <a:defRPr>
+                <a:solidFill>
+                  <a:schemeClr val="tx1"/>
+                </a:solidFill>
+                <a:latin typeface="Calibri" panose="020F0502020204030204" pitchFamily="34" charset="0"/>
+              </a:defRPr>
+            </a:lvl3pPr>
+            <a:lvl4pPr marL="1600200" indent="-228600">
+              <a:defRPr>
+                <a:solidFill>
+                  <a:schemeClr val="tx1"/>
+                </a:solidFill>
+                <a:latin typeface="Calibri" panose="020F0502020204030204" pitchFamily="34" charset="0"/>
+              </a:defRPr>
+            </a:lvl4pPr>
+            <a:lvl5pPr marL="2057400" indent="-228600">
+              <a:defRPr>
+                <a:solidFill>
+                  <a:schemeClr val="tx1"/>
+                </a:solidFill>
+                <a:latin typeface="Calibri" panose="020F0502020204030204" pitchFamily="34" charset="0"/>
+              </a:defRPr>
+            </a:lvl5pPr>
+            <a:lvl6pPr marL="2514600" indent="-228600" eaLnBrk="0" fontAlgn="base" hangingPunct="0">
+              <a:spcBef>
+                <a:spcPct val="0"/>
+              </a:spcBef>
+              <a:spcAft>
+                <a:spcPct val="0"/>
+              </a:spcAft>
+              <a:defRPr>
+                <a:solidFill>
+                  <a:schemeClr val="tx1"/>
+                </a:solidFill>
+                <a:latin typeface="Calibri" panose="020F0502020204030204" pitchFamily="34" charset="0"/>
+              </a:defRPr>
+            </a:lvl6pPr>
+            <a:lvl7pPr marL="2971800" indent="-228600" eaLnBrk="0" fontAlgn="base" hangingPunct="0">
+              <a:spcBef>
+                <a:spcPct val="0"/>
+              </a:spcBef>
+              <a:spcAft>
+                <a:spcPct val="0"/>
+              </a:spcAft>
+              <a:defRPr>
+                <a:solidFill>
+                  <a:schemeClr val="tx1"/>
+                </a:solidFill>
+                <a:latin typeface="Calibri" panose="020F0502020204030204" pitchFamily="34" charset="0"/>
+              </a:defRPr>
+            </a:lvl7pPr>
+            <a:lvl8pPr marL="3429000" indent="-228600" eaLnBrk="0" fontAlgn="base" hangingPunct="0">
+              <a:spcBef>
+                <a:spcPct val="0"/>
+              </a:spcBef>
+              <a:spcAft>
+                <a:spcPct val="0"/>
+              </a:spcAft>
+              <a:defRPr>
+                <a:solidFill>
+                  <a:schemeClr val="tx1"/>
+                </a:solidFill>
+                <a:latin typeface="Calibri" panose="020F0502020204030204" pitchFamily="34" charset="0"/>
+              </a:defRPr>
+            </a:lvl8pPr>
+            <a:lvl9pPr marL="3886200" indent="-228600" eaLnBrk="0" fontAlgn="base" hangingPunct="0">
+              <a:spcBef>
+                <a:spcPct val="0"/>
+              </a:spcBef>
+              <a:spcAft>
+                <a:spcPct val="0"/>
+              </a:spcAft>
+              <a:defRPr>
+                <a:solidFill>
+                  <a:schemeClr val="tx1"/>
+                </a:solidFill>
+                <a:latin typeface="Calibri" panose="020F0502020204030204" pitchFamily="34" charset="0"/>
+              </a:defRPr>
+            </a:lvl9pPr>
+          </a:lstStyle>
+          <a:p>
+            <a:pPr algn="ctr" eaLnBrk="1" hangingPunct="1"/>
+            <a:r>
+              <a:rPr lang="en-US" altLang="en-US" sz="1100" dirty="0">
+                <a:latin typeface="Arial" panose="020B0604020202020204" pitchFamily="34" charset="0"/>
+                <a:ea typeface="Amazon Ember" panose="020B0603020204020204" pitchFamily="34" charset="0"/>
+                <a:cs typeface="Arial" panose="020B0604020202020204" pitchFamily="34" charset="0"/>
+              </a:rPr>
+              <a:t>Google Drive</a:t>
+            </a:r>
+          </a:p>
+        </p:txBody>
+      </p:sp>
+      <p:sp>
+        <p:nvSpPr>
+          <p:cNvPr id="95" name="Rectangle 94">
+            <a:extLst>
+              <a:ext uri="{FF2B5EF4-FFF2-40B4-BE49-F238E27FC236}">
+                <a16:creationId xmlns:a16="http://schemas.microsoft.com/office/drawing/2014/main" id="{6B4EDF9C-3542-0E6A-767E-1C4D7FCE34C9}"/>
+              </a:ext>
+            </a:extLst>
+          </p:cNvPr>
+          <p:cNvSpPr/>
+          <p:nvPr/>
+        </p:nvSpPr>
+        <p:spPr>
+          <a:xfrm>
+            <a:off x="1239978" y="690661"/>
+            <a:ext cx="8602522" cy="5989534"/>
+          </a:xfrm>
+          <a:prstGeom prst="rect">
+            <a:avLst/>
+          </a:prstGeom>
+          <a:noFill/>
+          <a:ln w="12700">
+            <a:solidFill>
+              <a:schemeClr val="tx1"/>
+            </a:solidFill>
+          </a:ln>
+        </p:spPr>
+        <p:style>
+          <a:lnRef idx="2">
+            <a:schemeClr val="accent1">
+              <a:shade val="50000"/>
+            </a:schemeClr>
+          </a:lnRef>
+          <a:fillRef idx="1">
+            <a:schemeClr val="accent1"/>
+          </a:fillRef>
+          <a:effectRef idx="0">
+            <a:schemeClr val="accent1"/>
+          </a:effectRef>
+          <a:fontRef idx="minor">
+            <a:schemeClr val="lt1"/>
+          </a:fontRef>
+        </p:style>
+        <p:txBody>
+          <a:bodyPr lIns="502920" tIns="91440"/>
+          <a:lstStyle/>
+          <a:p>
+            <a:pPr eaLnBrk="1" fontAlgn="auto" hangingPunct="1">
+              <a:spcBef>
+                <a:spcPts val="0"/>
+              </a:spcBef>
+              <a:spcAft>
+                <a:spcPts val="0"/>
+              </a:spcAft>
+              <a:defRPr/>
+            </a:pPr>
+            <a:r>
+              <a:rPr lang="en-US" sz="1200" dirty="0">
+                <a:solidFill>
+                  <a:sysClr val="windowText" lastClr="000000"/>
+                </a:solidFill>
+                <a:latin typeface="Arial" panose="020B0604020202020204" pitchFamily="34" charset="0"/>
+                <a:cs typeface="Arial" panose="020B0604020202020204" pitchFamily="34" charset="0"/>
+              </a:rPr>
+              <a:t>AWS Cloud</a:t>
+            </a:r>
+          </a:p>
+        </p:txBody>
+      </p:sp>
+      <p:pic>
+        <p:nvPicPr>
+          <p:cNvPr id="96" name="Graphic 95">
+            <a:extLst>
+              <a:ext uri="{FF2B5EF4-FFF2-40B4-BE49-F238E27FC236}">
+                <a16:creationId xmlns:a16="http://schemas.microsoft.com/office/drawing/2014/main" id="{9C32E420-D2FE-31CE-89EC-6665F1BFF487}"/>
+              </a:ext>
+            </a:extLst>
+          </p:cNvPr>
+          <p:cNvPicPr>
+            <a:picLocks noChangeAspect="1"/>
+          </p:cNvPicPr>
+          <p:nvPr/>
+        </p:nvPicPr>
+        <p:blipFill>
+          <a:blip r:embed="rId22">
+            <a:extLst>
+              <a:ext uri="{96DAC541-7B7A-43D3-8B79-37D633B846F1}">
+                <asvg:svgBlip xmlns:asvg="http://schemas.microsoft.com/office/drawing/2016/SVG/main" r:embed="rId23"/>
+              </a:ext>
+            </a:extLst>
+          </a:blip>
+          <a:srcRect/>
+          <a:stretch/>
+        </p:blipFill>
+        <p:spPr>
+          <a:xfrm>
+            <a:off x="1239978" y="689073"/>
+            <a:ext cx="381000" cy="381000"/>
+          </a:xfrm>
+          <a:prstGeom prst="rect">
+            <a:avLst/>
+          </a:prstGeom>
+        </p:spPr>
+      </p:pic>
+    </p:spTree>
+    <p:extLst>
+      <p:ext uri="{BB962C8B-B14F-4D97-AF65-F5344CB8AC3E}">
+        <p14:creationId xmlns:p14="http://schemas.microsoft.com/office/powerpoint/2010/main" val="2481313050"/>
+      </p:ext>
+    </p:extLst>
+  </p:cSld>
+  <p:clrMapOvr>
+    <a:masterClrMapping/>
+  </p:clrMapOvr>
+</p:sld>
+</file>
+
 <file path=ppt/theme/theme1.xml><?xml version="1.0" encoding="utf-8"?>
 <a:theme xmlns:a="http://schemas.openxmlformats.org/drawingml/2006/main" name="Office Theme 2013 - 2022">
   <a:themeElements>
